--- a/submission/vimbiso-pitch-deck.pptx
+++ b/submission/vimbiso-pitch-deck.pptx
@@ -2134,7 +2134,7 @@
                 <a:ea typeface="Cambria" pitchFamily="34" charset="-122"/>
                 <a:cs typeface="Cambria" pitchFamily="34" charset="-120"/>
               </a:rPr>
-              <a:t>Live Twilio deployment</a:t>
+              <a:t>Real HAK/1195 handoff</a:t>
             </a:r>
             <a:endParaRPr lang="en-US" sz="1600" dirty="0"/>
           </a:p>
@@ -2176,7 +2176,7 @@
                 <a:ea typeface="Calibri" pitchFamily="34" charset="-122"/>
                 <a:cs typeface="Calibri" pitchFamily="34" charset="-120"/>
               </a:rPr>
-              <a:t>A real WhatsApp Sandbox round-trip and real SMS delivery — the one gap this sandboxed build cannot close on its own.</a:t>
+              <a:t>Move past a demo on-call number to an actual integration agreement, so counsellor-connect is a real warm handoff, not a simulated one.</a:t>
             </a:r>
             <a:endParaRPr lang="en-US" sz="1250" dirty="0"/>
           </a:p>
@@ -4560,7 +4560,7 @@
                 <a:ea typeface="Calibri" pitchFamily="34" charset="-122"/>
                 <a:cs typeface="Calibri" pitchFamily="34" charset="-120"/>
               </a:rPr>
-              <a:t>Real evidence this sprint: a live HIGH-risk journey run against a real Postgres database completed the full sequence — safety plan, real-code SMS alert, trusted-contact check-in, Pattern Watch match — within one handling cycle, in both English and Swahili.</a:t>
+              <a:t>Verified live this week: a real WhatsApp message through Twilio — backend and dashboard both deployed on Render — ran the full sequence end-to-end: safety plan, a real SMS that reached the on-call counsellor's phone, and the report showing correctly on the live dashboard.</a:t>
             </a:r>
             <a:endParaRPr lang="en-US" sz="1250" dirty="0"/>
           </a:p>
@@ -7072,7 +7072,7 @@
                 <a:ea typeface="Calibri" pitchFamily="34" charset="-122"/>
                 <a:cs typeface="Calibri" pitchFamily="34" charset="-120"/>
               </a:rPr>
-              <a:t>Real local Postgres database: migrations, seeds, and 5 full conversation journeys actually executed</a:t>
+              <a:t>Live end-to-end test: a real WhatsApp message through Twilio, on the deployed Render backend, ran the full HIGH-risk flow</a:t>
             </a:r>
             <a:endParaRPr lang="en-US" sz="1300" dirty="0"/>
           </a:p>
@@ -7096,7 +7096,7 @@
                 <a:ea typeface="Calibri" pitchFamily="34" charset="-122"/>
                 <a:cs typeface="Calibri" pitchFamily="34" charset="-120"/>
               </a:rPr>
-              <a:t>Live SQL-level verification of every dashboard query and a full privacy audit</a:t>
+              <a:t>Live SQL-level verification of every dashboard query and a full privacy audit — now confirmed live on the deployed dashboard too</a:t>
             </a:r>
             <a:endParaRPr lang="en-US" sz="1300" dirty="0"/>
           </a:p>
@@ -7203,7 +7203,7 @@
                 <a:ea typeface="Calibri" pitchFamily="34" charset="-122"/>
                 <a:cs typeface="Calibri" pitchFamily="34" charset="-120"/>
               </a:rPr>
-              <a:t>No live Twilio WhatsApp Sandbox round-trip yet — sandboxed dev environment has no outbound Twilio access</a:t>
+              <a:t>The on-call counsellor is a single demo Twilio number, not a live HAK/1195 integration</a:t>
             </a:r>
             <a:endParaRPr lang="en-US" sz="1300" dirty="0"/>
           </a:p>
@@ -7227,7 +7227,7 @@
                 <a:ea typeface="Calibri" pitchFamily="34" charset="-122"/>
                 <a:cs typeface="Calibri" pitchFamily="34" charset="-120"/>
               </a:rPr>
-              <a:t>No real SMS has reached a real phone yet — the SMS code path is real, the network call is captured, not sent</a:t>
+              <a:t>No masked-relay number — a survivor's real WhatsApp number is the identifier used</a:t>
             </a:r>
             <a:endParaRPr lang="en-US" sz="1300" dirty="0"/>
           </a:p>
@@ -7251,7 +7251,7 @@
                 <a:ea typeface="Calibri" pitchFamily="34" charset="-122"/>
                 <a:cs typeface="Calibri" pitchFamily="34" charset="-120"/>
               </a:rPr>
-              <a:t>Dashboard EJS rendering not yet run — no express/ejs install available here; verified at the query layer instead</a:t>
+              <a:t>Swahili and French remain PARTIAL tier, AI-drafted, and unreviewed</a:t>
             </a:r>
             <a:endParaRPr lang="en-US" sz="1300" dirty="0"/>
           </a:p>

--- a/submission/vimbiso-pitch-deck.pptx
+++ b/submission/vimbiso-pitch-deck.pptx
@@ -2002,7 +2002,7 @@
                 <a:ea typeface="Calibri" pitchFamily="34" charset="-122"/>
                 <a:cs typeface="Calibri" pitchFamily="34" charset="-120"/>
               </a:rPr>
-              <a:t>OSF / Andela Hackathon  ·  Kenya Pilot  ·  Tendai Moyo &amp; Nnouka</a:t>
+              <a:t>OSF / Andela Hackathon  ·  Kenya Pilot  ·  Built solo by Nnouka</a:t>
             </a:r>
             <a:endParaRPr lang="en-US" sz="1300" dirty="0"/>
           </a:p>
@@ -4560,7 +4560,7 @@
                 <a:ea typeface="Calibri" pitchFamily="34" charset="-122"/>
                 <a:cs typeface="Calibri" pitchFamily="34" charset="-120"/>
               </a:rPr>
-              <a:t>Verified live this week: a real WhatsApp message through Twilio — backend and dashboard both deployed on Render — ran the full sequence end-to-end: safety plan, a real SMS that reached the on-call counsellor's phone, and the report showing correctly on the live dashboard.</a:t>
+              <a:t>Verified live: a real WhatsApp message through the Twilio Sandbox — backend and dashboard both deployed on Render, Postgres on Supabase — ran the full sequence end-to-end: safety plan, a real SMS confirmed in the Twilio console reaching the on-call counsellor, and the report showing correctly on the live dashboard.</a:t>
             </a:r>
             <a:endParaRPr lang="en-US" sz="1250" dirty="0"/>
           </a:p>
@@ -7072,7 +7072,7 @@
                 <a:ea typeface="Calibri" pitchFamily="34" charset="-122"/>
                 <a:cs typeface="Calibri" pitchFamily="34" charset="-120"/>
               </a:rPr>
-              <a:t>Live end-to-end test: a real WhatsApp message through Twilio, on the deployed Render backend, ran the full HIGH-risk flow</a:t>
+              <a:t>Live end-to-end test: a real WhatsApp message through the Twilio Sandbox, on Render (backend + dashboard) with Postgres on Supabase, ran the full HIGH-risk flow</a:t>
             </a:r>
             <a:endParaRPr lang="en-US" sz="1300" dirty="0"/>
           </a:p>
@@ -7096,7 +7096,7 @@
                 <a:ea typeface="Calibri" pitchFamily="34" charset="-122"/>
                 <a:cs typeface="Calibri" pitchFamily="34" charset="-120"/>
               </a:rPr>
-              <a:t>Live SQL-level verification of every dashboard query and a full privacy audit — now confirmed live on the deployed dashboard too</a:t>
+              <a:t>A real SMS reached the on-call counsellor, confirmed in the Twilio console — and the report appeared correctly on the live, Supabase-backed dashboard</a:t>
             </a:r>
             <a:endParaRPr lang="en-US" sz="1300" dirty="0"/>
           </a:p>
@@ -8050,7 +8050,7 @@
                 <a:ea typeface="Cambria" pitchFamily="34" charset="-122"/>
                 <a:cs typeface="Cambria" pitchFamily="34" charset="-120"/>
               </a:rPr>
-              <a:t>Built by a team with lived, not theoretical, reach</a:t>
+              <a:t>One human founder — AI agents disclosed honestly</a:t>
             </a:r>
             <a:endParaRPr lang="en-US" sz="3200" dirty="0"/>
           </a:p>
@@ -8150,7 +8150,7 @@
                 <a:ea typeface="Calibri" pitchFamily="34" charset="-122"/>
                 <a:cs typeface="Calibri" pitchFamily="34" charset="-120"/>
               </a:rPr>
-              <a:t>Harare-based civic-tech founder, native Shona speaker.</a:t>
+              <a:t>An AI agent persona from ideation — not a real person.</a:t>
             </a:r>
             <a:endParaRPr lang="en-US" sz="1300" dirty="0"/>
           </a:p>
@@ -8192,7 +8192,7 @@
                 <a:ea typeface="Calibri" pitchFamily="34" charset="-122"/>
                 <a:cs typeface="Calibri" pitchFamily="34" charset="-120"/>
               </a:rPr>
-              <a:t>Leads product and the original Zimbabwe-origin research that shaped the risk-triage design; drove the pitch, deck, video, and reviewer coordination.</a:t>
+              <a:t>One of four AI agent personas used for competitive ideation (see AI Tool Usage Log). Generated the original concept, then pressure-tested it against real evidence.</a:t>
             </a:r>
             <a:endParaRPr lang="en-US" sz="1300" dirty="0"/>
           </a:p>
@@ -8334,7 +8334,7 @@
                 <a:ea typeface="Calibri" pitchFamily="34" charset="-122"/>
                 <a:cs typeface="Calibri" pitchFamily="34" charset="-120"/>
               </a:rPr>
-              <a:t>Leads the French-language build and review as a native speaker and core team member — the same market whose femicide data corrected our core safety mechanism during development. Also coordinating a Kinyarwanda lead through Kigali networks.</a:t>
+              <a:t>Sole human founder and builder. Leads the French-language build and review as a native speaker and core team member — the same market whose femicide data corrected our core safety mechanism during development. Also coordinating a Kinyarwanda lead through Kigali networks.</a:t>
             </a:r>
             <a:endParaRPr lang="en-US" sz="1300" dirty="0"/>
           </a:p>

--- a/submission/vimbiso-pitch-deck.pptx
+++ b/submission/vimbiso-pitch-deck.pptx
@@ -4,6 +4,9 @@
   <p:sldMasterIdLst>
     <p:sldMasterId id="2147483648" r:id="rId1"/>
   </p:sldMasterIdLst>
+  <p:notesMasterIdLst>
+    <p:notesMasterId r:id="rId13"/>
+  </p:notesMasterIdLst>
   <p:sldIdLst>
     <p:sldId id="256" r:id="rId2"/>
     <p:sldId id="257" r:id="rId3"/>
@@ -17,9 +20,6 @@
     <p:sldId id="265" r:id="rId11"/>
     <p:sldId id="266" r:id="rId12"/>
   </p:sldIdLst>
-  <p:notesMasterIdLst>
-    <p:notesMasterId r:id="rId13"/>
-  </p:notesMasterIdLst>
   <p:sldSz cx="12192000" cy="6858000"/>
   <p:notesSz cx="6858000" cy="12192000"/>
   <p:defaultTextStyle>
@@ -114,6 +114,11 @@
       </a:defRPr>
     </a:lvl9pPr>
   </p:defaultTextStyle>
+  <p:extLst>
+    <p:ext uri="{EFAFB233-063F-42B5-8137-9DF3F51BA10A}">
+      <p15:sldGuideLst xmlns:p15="http://schemas.microsoft.com/office/powerpoint/2012/main"/>
+    </p:ext>
+  </p:extLst>
 </p:presentation>
 </file>
 
@@ -139,234 +144,10 @@
           <a:chExt cx="0" cy="0"/>
         </a:xfrm>
       </p:grpSpPr>
-      <p:sp>
-        <p:nvSpPr>
-          <p:cNvPr id="2" name="Header Placeholder 1"/>
-          <p:cNvSpPr>
-            <a:spLocks noGrp="1"/>
-          </p:cNvSpPr>
-          <p:nvPr>
-            <p:ph type="hdr" sz="quarter"/>
-          </p:nvPr>
-        </p:nvSpPr>
-        <p:spPr>
-          <a:xfrm>
-            <a:off x="0" y="0"/>
-            <a:ext cx="2971800" cy="458788"/>
-          </a:xfrm>
-          <a:prstGeom prst="rect">
-            <a:avLst/>
-          </a:prstGeom>
-        </p:spPr>
-        <p:txBody>
-          <a:bodyPr vert="horz" lIns="91440" tIns="45720" rIns="91440" bIns="45720" rtlCol="0"/>
-          <a:lstStyle>
-            <a:lvl1pPr algn="l">
-              <a:defRPr sz="1200"/>
-            </a:lvl1pPr>
-          </a:lstStyle>
-          <a:p>
-            <a:endParaRPr lang="en-US"/>
-          </a:p>
-        </p:txBody>
-      </p:sp>
-      <p:sp>
-        <p:nvSpPr>
-          <p:cNvPr id="3" name="Date Placeholder 2"/>
-          <p:cNvSpPr>
-            <a:spLocks noGrp="1"/>
-          </p:cNvSpPr>
-          <p:nvPr>
-            <p:ph type="dt" idx="1"/>
-          </p:nvPr>
-        </p:nvSpPr>
-        <p:spPr>
-          <a:xfrm>
-            <a:off x="3884613" y="0"/>
-            <a:ext cx="2971800" cy="458788"/>
-          </a:xfrm>
-          <a:prstGeom prst="rect">
-            <a:avLst/>
-          </a:prstGeom>
-        </p:spPr>
-        <p:txBody>
-          <a:bodyPr vert="horz" lIns="91440" tIns="45720" rIns="91440" bIns="45720" rtlCol="0"/>
-          <a:lstStyle>
-            <a:lvl1pPr algn="r">
-              <a:defRPr sz="1200"/>
-            </a:lvl1pPr>
-          </a:lstStyle>
-          <a:p>
-            <a:fld id="{5282F153-3F37-0F45-9E97-73ACFA13230C}" type="datetimeFigureOut">
-              <a:rPr lang="en-US"/>
-              <a:t>7/23/19</a:t>
-            </a:fld>
-            <a:endParaRPr lang="en-US"/>
-          </a:p>
-        </p:txBody>
-      </p:sp>
-      <p:sp>
-        <p:nvSpPr>
-          <p:cNvPr id="4" name="Slide Image Placeholder 3"/>
-          <p:cNvSpPr>
-            <a:spLocks noGrp="1" noRot="1" noChangeAspect="1"/>
-          </p:cNvSpPr>
-          <p:nvPr>
-            <p:ph type="sldImg" idx="2"/>
-          </p:nvPr>
-        </p:nvSpPr>
-        <p:spPr>
-          <a:xfrm>
-            <a:off x="685800" y="1143000"/>
-            <a:ext cx="5486400" cy="3086100"/>
-          </a:xfrm>
-          <a:prstGeom prst="rect">
-            <a:avLst/>
-          </a:prstGeom>
-          <a:noFill/>
-          <a:ln w="12700">
-            <a:solidFill>
-              <a:prstClr val="black"/>
-            </a:solidFill>
-          </a:ln>
-        </p:spPr>
-        <p:txBody>
-          <a:bodyPr vert="horz" lIns="91440" tIns="45720" rIns="91440" bIns="45720" rtlCol="0" anchor="ctr"/>
-          <a:lstStyle/>
-          <a:p>
-            <a:endParaRPr lang="en-US"/>
-          </a:p>
-        </p:txBody>
-      </p:sp>
-      <p:sp>
-        <p:nvSpPr>
-          <p:cNvPr id="5" name="Notes Placeholder 4"/>
-          <p:cNvSpPr>
-            <a:spLocks noGrp="1"/>
-          </p:cNvSpPr>
-          <p:nvPr>
-            <p:ph type="body" sz="quarter" idx="3"/>
-          </p:nvPr>
-        </p:nvSpPr>
-        <p:spPr>
-          <a:xfrm>
-            <a:off x="685800" y="4400550"/>
-            <a:ext cx="5486400" cy="3600450"/>
-          </a:xfrm>
-          <a:prstGeom prst="rect">
-            <a:avLst/>
-          </a:prstGeom>
-        </p:spPr>
-        <p:txBody>
-          <a:bodyPr vert="horz" lIns="91440" tIns="45720" rIns="91440" bIns="45720" rtlCol="0"/>
-          <a:lstStyle/>
-          <a:p>
-            <a:pPr lvl="0"/>
-            <a:r>
-              <a:rPr lang="en-US"/>
-              <a:t>Click to edit Master text styles</a:t>
-            </a:r>
-          </a:p>
-          <a:p>
-            <a:pPr lvl="1"/>
-            <a:r>
-              <a:rPr lang="en-US"/>
-              <a:t>Second level</a:t>
-            </a:r>
-          </a:p>
-          <a:p>
-            <a:pPr lvl="2"/>
-            <a:r>
-              <a:rPr lang="en-US"/>
-              <a:t>Third level</a:t>
-            </a:r>
-          </a:p>
-          <a:p>
-            <a:pPr lvl="3"/>
-            <a:r>
-              <a:rPr lang="en-US"/>
-              <a:t>Fourth level</a:t>
-            </a:r>
-          </a:p>
-          <a:p>
-            <a:pPr lvl="4"/>
-            <a:r>
-              <a:rPr lang="en-US"/>
-              <a:t>Fifth level</a:t>
-            </a:r>
-          </a:p>
-        </p:txBody>
-      </p:sp>
-      <p:sp>
-        <p:nvSpPr>
-          <p:cNvPr id="6" name="Footer Placeholder 5"/>
-          <p:cNvSpPr>
-            <a:spLocks noGrp="1"/>
-          </p:cNvSpPr>
-          <p:nvPr>
-            <p:ph type="ftr" sz="quarter" idx="4"/>
-          </p:nvPr>
-        </p:nvSpPr>
-        <p:spPr>
-          <a:xfrm>
-            <a:off x="0" y="8685213"/>
-            <a:ext cx="2971800" cy="458787"/>
-          </a:xfrm>
-          <a:prstGeom prst="rect">
-            <a:avLst/>
-          </a:prstGeom>
-        </p:spPr>
-        <p:txBody>
-          <a:bodyPr vert="horz" lIns="91440" tIns="45720" rIns="91440" bIns="45720" rtlCol="0" anchor="b"/>
-          <a:lstStyle>
-            <a:lvl1pPr algn="l">
-              <a:defRPr sz="1200"/>
-            </a:lvl1pPr>
-          </a:lstStyle>
-          <a:p>
-            <a:endParaRPr lang="en-US"/>
-          </a:p>
-        </p:txBody>
-      </p:sp>
-      <p:sp>
-        <p:nvSpPr>
-          <p:cNvPr id="7" name="Slide Number Placeholder 6"/>
-          <p:cNvSpPr>
-            <a:spLocks noGrp="1"/>
-          </p:cNvSpPr>
-          <p:nvPr>
-            <p:ph type="sldNum" sz="quarter" idx="5"/>
-          </p:nvPr>
-        </p:nvSpPr>
-        <p:spPr>
-          <a:xfrm>
-            <a:off x="3884613" y="8685213"/>
-            <a:ext cx="2971800" cy="458787"/>
-          </a:xfrm>
-          <a:prstGeom prst="rect">
-            <a:avLst/>
-          </a:prstGeom>
-        </p:spPr>
-        <p:txBody>
-          <a:bodyPr vert="horz" lIns="91440" tIns="45720" rIns="91440" bIns="45720" rtlCol="0" anchor="b"/>
-          <a:lstStyle>
-            <a:lvl1pPr algn="r">
-              <a:defRPr sz="1200"/>
-            </a:lvl1pPr>
-          </a:lstStyle>
-          <a:p>
-            <a:fld id="{CE5E9CC1-C706-0F49-92D6-E571CC5EEA8F}" type="slidenum">
-              <a:rPr lang="en-US"/>
-              <a:t>‹#›</a:t>
-            </a:fld>
-            <a:endParaRPr lang="en-US"/>
-          </a:p>
-        </p:txBody>
-      </p:sp>
     </p:spTree>
     <p:extLst>
       <p:ext uri="{BB962C8B-B14F-4D97-AF65-F5344CB8AC3E}">
-        <p14:creationId xmlns:p14="http://schemas.microsoft.com/office/powerpoint/2010/main" val="1024086991"/>
+        <p14:creationId xmlns:p14="http://schemas.microsoft.com/office/powerpoint/2010/main" val="2307900728"/>
       </p:ext>
     </p:extLst>
   </p:cSld>
@@ -510,10 +291,6 @@
           <a:bodyPr/>
           <a:lstStyle/>
           <a:p>
-            <a:r>
-              <a:rPr lang="en-US" dirty="0"/>
-              <a:t/>
-            </a:r>
             <a:endParaRPr lang="en-US" dirty="0"/>
           </a:p>
         </p:txBody>
@@ -598,10 +375,6 @@
           <a:bodyPr/>
           <a:lstStyle/>
           <a:p>
-            <a:r>
-              <a:rPr lang="en-US" dirty="0"/>
-              <a:t/>
-            </a:r>
             <a:endParaRPr lang="en-US" dirty="0"/>
           </a:p>
         </p:txBody>
@@ -686,10 +459,6 @@
           <a:bodyPr/>
           <a:lstStyle/>
           <a:p>
-            <a:r>
-              <a:rPr lang="en-US" dirty="0"/>
-              <a:t/>
-            </a:r>
             <a:endParaRPr lang="en-US" dirty="0"/>
           </a:p>
         </p:txBody>
@@ -774,10 +543,6 @@
           <a:bodyPr/>
           <a:lstStyle/>
           <a:p>
-            <a:r>
-              <a:rPr lang="en-US" dirty="0"/>
-              <a:t/>
-            </a:r>
             <a:endParaRPr lang="en-US" dirty="0"/>
           </a:p>
         </p:txBody>
@@ -862,10 +627,6 @@
           <a:bodyPr/>
           <a:lstStyle/>
           <a:p>
-            <a:r>
-              <a:rPr lang="en-US" dirty="0"/>
-              <a:t/>
-            </a:r>
             <a:endParaRPr lang="en-US" dirty="0"/>
           </a:p>
         </p:txBody>
@@ -950,10 +711,6 @@
           <a:bodyPr/>
           <a:lstStyle/>
           <a:p>
-            <a:r>
-              <a:rPr lang="en-US" dirty="0"/>
-              <a:t/>
-            </a:r>
             <a:endParaRPr lang="en-US" dirty="0"/>
           </a:p>
         </p:txBody>
@@ -1038,10 +795,6 @@
           <a:bodyPr/>
           <a:lstStyle/>
           <a:p>
-            <a:r>
-              <a:rPr lang="en-US" dirty="0"/>
-              <a:t/>
-            </a:r>
             <a:endParaRPr lang="en-US" dirty="0"/>
           </a:p>
         </p:txBody>
@@ -1126,10 +879,6 @@
           <a:bodyPr/>
           <a:lstStyle/>
           <a:p>
-            <a:r>
-              <a:rPr lang="en-US" dirty="0"/>
-              <a:t/>
-            </a:r>
             <a:endParaRPr lang="en-US" dirty="0"/>
           </a:p>
         </p:txBody>
@@ -1214,10 +963,6 @@
           <a:bodyPr/>
           <a:lstStyle/>
           <a:p>
-            <a:r>
-              <a:rPr lang="en-US" dirty="0"/>
-              <a:t/>
-            </a:r>
             <a:endParaRPr lang="en-US" dirty="0"/>
           </a:p>
         </p:txBody>
@@ -1302,10 +1047,6 @@
           <a:bodyPr/>
           <a:lstStyle/>
           <a:p>
-            <a:r>
-              <a:rPr lang="en-US" dirty="0"/>
-              <a:t/>
-            </a:r>
             <a:endParaRPr lang="en-US" dirty="0"/>
           </a:p>
         </p:txBody>
@@ -1390,10 +1131,6 @@
           <a:bodyPr/>
           <a:lstStyle/>
           <a:p>
-            <a:r>
-              <a:rPr lang="en-US" dirty="0"/>
-              <a:t/>
-            </a:r>
             <a:endParaRPr lang="en-US" dirty="0"/>
           </a:p>
         </p:txBody>
@@ -1467,6 +1204,11 @@
 <file path=ppt/slideMasters/slideMaster1.xml><?xml version="1.0" encoding="utf-8"?>
 <p:sldMaster xmlns:a="http://schemas.openxmlformats.org/drawingml/2006/main" xmlns:r="http://schemas.openxmlformats.org/officeDocument/2006/relationships" xmlns:p="http://schemas.openxmlformats.org/presentationml/2006/main">
   <p:cSld>
+    <p:bg>
+      <p:bgRef idx="1001">
+        <a:schemeClr val="bg1"/>
+      </p:bgRef>
+    </p:bg>
     <p:spTree>
       <p:nvGrpSpPr>
         <p:cNvPr id="1" name=""/>
@@ -1749,6 +1491,7 @@
         <a:solidFill>
           <a:srgbClr val="0B2E33"/>
         </a:solidFill>
+        <a:effectLst/>
       </p:bgPr>
     </p:bg>
     <p:spTree>
@@ -1784,6 +1527,13 @@
           </a:solidFill>
           <a:ln/>
         </p:spPr>
+        <p:txBody>
+          <a:bodyPr/>
+          <a:lstStyle/>
+          <a:p>
+            <a:endParaRPr lang="en-US"/>
+          </a:p>
+        </p:txBody>
       </p:sp>
       <p:sp>
         <p:nvSpPr>
@@ -1806,6 +1556,13 @@
           </a:solidFill>
           <a:ln/>
         </p:spPr>
+        <p:txBody>
+          <a:bodyPr/>
+          <a:lstStyle/>
+          <a:p>
+            <a:endParaRPr lang="en-US"/>
+          </a:p>
+        </p:txBody>
       </p:sp>
       <p:sp>
         <p:nvSpPr>
@@ -1828,6 +1585,13 @@
           </a:solidFill>
           <a:ln/>
         </p:spPr>
+        <p:txBody>
+          <a:bodyPr/>
+          <a:lstStyle/>
+          <a:p>
+            <a:endParaRPr lang="en-US"/>
+          </a:p>
+        </p:txBody>
       </p:sp>
       <p:sp>
         <p:nvSpPr>
@@ -1850,11 +1614,11 @@
           <a:bodyPr wrap="square" lIns="0" tIns="0" rIns="0" bIns="0" rtlCol="0" anchor="ctr"/>
           <a:lstStyle/>
           <a:p>
-            <a:pPr indent="0" marL="0">
-              <a:buNone/>
-            </a:pPr>
-            <a:r>
-              <a:rPr lang="en-US" sz="1300" b="1" spc="300" kern="0" dirty="0">
+            <a:pPr marL="0" indent="0">
+              <a:buNone/>
+            </a:pPr>
+            <a:r>
+              <a:rPr lang="en-US" sz="1300" b="1" kern="0" spc="300" dirty="0">
                 <a:solidFill>
                   <a:srgbClr val="02C39A"/>
                 </a:solidFill>
@@ -1889,7 +1653,7 @@
           <a:bodyPr wrap="square" lIns="0" tIns="0" rIns="0" bIns="0" rtlCol="0" anchor="ctr"/>
           <a:lstStyle/>
           <a:p>
-            <a:pPr indent="0" marL="0">
+            <a:pPr marL="0" indent="0">
               <a:buNone/>
             </a:pPr>
             <a:r>
@@ -1928,7 +1692,7 @@
           <a:bodyPr wrap="square" lIns="0" tIns="0" rIns="0" bIns="0" rtlCol="0" anchor="ctr"/>
           <a:lstStyle/>
           <a:p>
-            <a:pPr indent="0" marL="0">
+            <a:pPr marL="0" indent="0">
               <a:lnSpc>
                 <a:spcPct val="125000"/>
               </a:lnSpc>
@@ -1948,7 +1712,7 @@
             <a:endParaRPr lang="en-US" sz="1800" dirty="0"/>
           </a:p>
           <a:p>
-            <a:pPr indent="0" marL="0">
+            <a:pPr marL="0" indent="0">
               <a:lnSpc>
                 <a:spcPct val="125000"/>
               </a:lnSpc>
@@ -1990,7 +1754,7 @@
           <a:bodyPr wrap="square" lIns="0" tIns="0" rIns="0" bIns="0" rtlCol="0" anchor="ctr"/>
           <a:lstStyle/>
           <a:p>
-            <a:pPr indent="0" marL="0">
+            <a:pPr marL="0" indent="0">
               <a:buNone/>
             </a:pPr>
             <a:r>
@@ -2024,6 +1788,7 @@
         <a:solidFill>
           <a:srgbClr val="FFFFFF"/>
         </a:solidFill>
+        <a:effectLst/>
       </p:bgPr>
     </p:bg>
     <p:spTree>
@@ -2061,7 +1826,7 @@
           <a:bodyPr wrap="square" lIns="0" tIns="0" rIns="0" bIns="0" rtlCol="0" anchor="ctr"/>
           <a:lstStyle/>
           <a:p>
-            <a:pPr algn="l" indent="0" marL="0">
+            <a:pPr marL="0" indent="0" algn="l">
               <a:buNone/>
             </a:pPr>
             <a:r>
@@ -2100,6 +1865,13 @@
           </a:solidFill>
           <a:ln/>
         </p:spPr>
+        <p:txBody>
+          <a:bodyPr/>
+          <a:lstStyle/>
+          <a:p>
+            <a:endParaRPr lang="en-US"/>
+          </a:p>
+        </p:txBody>
       </p:sp>
       <p:sp>
         <p:nvSpPr>
@@ -2122,7 +1894,7 @@
           <a:bodyPr wrap="square" lIns="0" tIns="0" rIns="0" bIns="0" rtlCol="0" anchor="ctr"/>
           <a:lstStyle/>
           <a:p>
-            <a:pPr indent="0" marL="0">
+            <a:pPr marL="0" indent="0">
               <a:buNone/>
             </a:pPr>
             <a:r>
@@ -2161,7 +1933,7 @@
           <a:bodyPr wrap="square" lIns="0" tIns="0" rIns="0" bIns="0" rtlCol="0" anchor="ctr"/>
           <a:lstStyle/>
           <a:p>
-            <a:pPr indent="0" marL="0">
+            <a:pPr marL="0" indent="0">
               <a:lnSpc>
                 <a:spcPct val="120000"/>
               </a:lnSpc>
@@ -2203,6 +1975,13 @@
           </a:solidFill>
           <a:ln/>
         </p:spPr>
+        <p:txBody>
+          <a:bodyPr/>
+          <a:lstStyle/>
+          <a:p>
+            <a:endParaRPr lang="en-US"/>
+          </a:p>
+        </p:txBody>
       </p:sp>
       <p:sp>
         <p:nvSpPr>
@@ -2225,7 +2004,7 @@
           <a:bodyPr wrap="square" lIns="0" tIns="0" rIns="0" bIns="0" rtlCol="0" anchor="ctr"/>
           <a:lstStyle/>
           <a:p>
-            <a:pPr indent="0" marL="0">
+            <a:pPr marL="0" indent="0">
               <a:buNone/>
             </a:pPr>
             <a:r>
@@ -2264,7 +2043,7 @@
           <a:bodyPr wrap="square" lIns="0" tIns="0" rIns="0" bIns="0" rtlCol="0" anchor="ctr"/>
           <a:lstStyle/>
           <a:p>
-            <a:pPr indent="0" marL="0">
+            <a:pPr marL="0" indent="0">
               <a:lnSpc>
                 <a:spcPct val="120000"/>
               </a:lnSpc>
@@ -2306,6 +2085,13 @@
           </a:solidFill>
           <a:ln/>
         </p:spPr>
+        <p:txBody>
+          <a:bodyPr/>
+          <a:lstStyle/>
+          <a:p>
+            <a:endParaRPr lang="en-US"/>
+          </a:p>
+        </p:txBody>
       </p:sp>
       <p:sp>
         <p:nvSpPr>
@@ -2328,7 +2114,7 @@
           <a:bodyPr wrap="square" lIns="0" tIns="0" rIns="0" bIns="0" rtlCol="0" anchor="ctr"/>
           <a:lstStyle/>
           <a:p>
-            <a:pPr indent="0" marL="0">
+            <a:pPr marL="0" indent="0">
               <a:buNone/>
             </a:pPr>
             <a:r>
@@ -2367,7 +2153,7 @@
           <a:bodyPr wrap="square" lIns="0" tIns="0" rIns="0" bIns="0" rtlCol="0" anchor="ctr"/>
           <a:lstStyle/>
           <a:p>
-            <a:pPr indent="0" marL="0">
+            <a:pPr marL="0" indent="0">
               <a:lnSpc>
                 <a:spcPct val="120000"/>
               </a:lnSpc>
@@ -2409,6 +2195,13 @@
           </a:solidFill>
           <a:ln/>
         </p:spPr>
+        <p:txBody>
+          <a:bodyPr/>
+          <a:lstStyle/>
+          <a:p>
+            <a:endParaRPr lang="en-US"/>
+          </a:p>
+        </p:txBody>
       </p:sp>
       <p:sp>
         <p:nvSpPr>
@@ -2431,7 +2224,7 @@
           <a:bodyPr wrap="square" lIns="0" tIns="0" rIns="0" bIns="0" rtlCol="0" anchor="ctr"/>
           <a:lstStyle/>
           <a:p>
-            <a:pPr indent="0" marL="0">
+            <a:pPr marL="0" indent="0">
               <a:buNone/>
             </a:pPr>
             <a:r>
@@ -2470,7 +2263,7 @@
           <a:bodyPr wrap="square" lIns="0" tIns="0" rIns="0" bIns="0" rtlCol="0" anchor="ctr"/>
           <a:lstStyle/>
           <a:p>
-            <a:pPr indent="0" marL="0">
+            <a:pPr marL="0" indent="0">
               <a:lnSpc>
                 <a:spcPct val="120000"/>
               </a:lnSpc>
@@ -2512,7 +2305,7 @@
           <a:bodyPr wrap="square" lIns="0" tIns="0" rIns="0" bIns="0" rtlCol="0" anchor="ctr"/>
           <a:lstStyle/>
           <a:p>
-            <a:pPr algn="r" indent="0" marL="0">
+            <a:pPr marL="0" indent="0" algn="r">
               <a:buNone/>
             </a:pPr>
             <a:r>
@@ -2546,6 +2339,7 @@
         <a:solidFill>
           <a:srgbClr val="0B2E33"/>
         </a:solidFill>
+        <a:effectLst/>
       </p:bgPr>
     </p:bg>
     <p:spTree>
@@ -2583,6 +2377,13 @@
           </a:solidFill>
           <a:ln/>
         </p:spPr>
+        <p:txBody>
+          <a:bodyPr/>
+          <a:lstStyle/>
+          <a:p>
+            <a:endParaRPr lang="en-US"/>
+          </a:p>
+        </p:txBody>
       </p:sp>
       <p:sp>
         <p:nvSpPr>
@@ -2605,7 +2406,7 @@
           <a:bodyPr wrap="square" lIns="0" tIns="0" rIns="0" bIns="0" rtlCol="0" anchor="ctr"/>
           <a:lstStyle/>
           <a:p>
-            <a:pPr indent="0" marL="0">
+            <a:pPr marL="0" indent="0">
               <a:buNone/>
             </a:pPr>
             <a:r>
@@ -2644,7 +2445,7 @@
           <a:bodyPr wrap="square" lIns="0" tIns="0" rIns="0" bIns="0" rtlCol="0" anchor="ctr"/>
           <a:lstStyle/>
           <a:p>
-            <a:pPr indent="0" marL="0">
+            <a:pPr marL="0" indent="0">
               <a:lnSpc>
                 <a:spcPct val="130000"/>
               </a:lnSpc>
@@ -2686,9 +2487,6 @@
           <a:bodyPr wrap="square" lIns="0" tIns="0" rIns="0" bIns="0" rtlCol="0" anchor="ctr"/>
           <a:lstStyle/>
           <a:p>
-            <a:pPr indent="0" marL="0">
-              <a:buNone/>
-            </a:pPr>
             <a:r>
               <a:rPr lang="en-US" sz="1300" dirty="0">
                 <a:solidFill>
@@ -2697,8 +2495,20 @@
                 <a:latin typeface="Calibri" pitchFamily="34" charset="0"/>
                 <a:ea typeface="Calibri" pitchFamily="34" charset="-122"/>
                 <a:cs typeface="Calibri" pitchFamily="34" charset="-120"/>
-              </a:rPr>
-              <a:t>github.com/[org]/vimbiso   ·   docs/qa-sprint3-report.md   ·   docs/mvp-spec.md</a:t>
+                <a:hlinkClick r:id="rId3"/>
+              </a:rPr>
+              <a:t>https://github.com/Nnouka/vimbiso</a:t>
+            </a:r>
+            <a:r>
+              <a:rPr lang="en-US" sz="1300" dirty="0">
+                <a:solidFill>
+                  <a:srgbClr val="02C39A"/>
+                </a:solidFill>
+                <a:latin typeface="Calibri" pitchFamily="34" charset="0"/>
+                <a:ea typeface="Calibri" pitchFamily="34" charset="-122"/>
+                <a:cs typeface="Calibri" pitchFamily="34" charset="-120"/>
+              </a:rPr>
+              <a:t> ·   docs/qa-sprint3-report.md   ·   docs/mvp-spec.md</a:t>
             </a:r>
             <a:endParaRPr lang="en-US" sz="1300" dirty="0"/>
           </a:p>
@@ -2720,6 +2530,7 @@
         <a:solidFill>
           <a:srgbClr val="FFFFFF"/>
         </a:solidFill>
+        <a:effectLst/>
       </p:bgPr>
     </p:bg>
     <p:spTree>
@@ -2757,7 +2568,7 @@
           <a:bodyPr wrap="square" lIns="0" tIns="0" rIns="0" bIns="0" rtlCol="0" anchor="ctr"/>
           <a:lstStyle/>
           <a:p>
-            <a:pPr algn="l" indent="0" marL="0">
+            <a:pPr marL="0" indent="0" algn="l">
               <a:buNone/>
             </a:pPr>
             <a:r>
@@ -2796,13 +2607,20 @@
           </a:solidFill>
           <a:ln/>
           <a:effectLst>
-            <a:outerShdw sx="100000" sy="100000" kx="0" ky="0" algn="bl" rotWithShape="0" blurRad="101600" dist="38100" dir="5400000">
+            <a:outerShdw blurRad="101600" dist="38100" dir="5400000" algn="bl" rotWithShape="0">
               <a:srgbClr val="1B4B4E">
                 <a:alpha val="15000"/>
               </a:srgbClr>
             </a:outerShdw>
           </a:effectLst>
         </p:spPr>
+        <p:txBody>
+          <a:bodyPr/>
+          <a:lstStyle/>
+          <a:p>
+            <a:endParaRPr lang="en-US"/>
+          </a:p>
+        </p:txBody>
       </p:sp>
       <p:sp>
         <p:nvSpPr>
@@ -2825,7 +2643,7 @@
           <a:bodyPr wrap="square" lIns="0" tIns="0" rIns="0" bIns="0" rtlCol="0" anchor="ctr"/>
           <a:lstStyle/>
           <a:p>
-            <a:pPr algn="ctr" indent="0" marL="0">
+            <a:pPr marL="0" indent="0" algn="ctr">
               <a:buNone/>
             </a:pPr>
             <a:r>
@@ -2864,7 +2682,7 @@
           <a:bodyPr wrap="square" lIns="0" tIns="0" rIns="0" bIns="0" rtlCol="0" anchor="ctr"/>
           <a:lstStyle/>
           <a:p>
-            <a:pPr algn="ctr" indent="0" marL="0">
+            <a:pPr marL="0" indent="0" algn="ctr">
               <a:lnSpc>
                 <a:spcPct val="115000"/>
               </a:lnSpc>
@@ -2884,7 +2702,7 @@
             <a:endParaRPr lang="en-US" sz="1300" dirty="0"/>
           </a:p>
           <a:p>
-            <a:pPr algn="ctr" indent="0" marL="0">
+            <a:pPr marL="0" indent="0" algn="ctr">
               <a:lnSpc>
                 <a:spcPct val="115000"/>
               </a:lnSpc>
@@ -2926,13 +2744,20 @@
           </a:solidFill>
           <a:ln/>
           <a:effectLst>
-            <a:outerShdw sx="100000" sy="100000" kx="0" ky="0" algn="bl" rotWithShape="0" blurRad="101600" dist="38100" dir="5400000">
+            <a:outerShdw blurRad="101600" dist="38100" dir="5400000" algn="bl" rotWithShape="0">
               <a:srgbClr val="1B4B4E">
                 <a:alpha val="15000"/>
               </a:srgbClr>
             </a:outerShdw>
           </a:effectLst>
         </p:spPr>
+        <p:txBody>
+          <a:bodyPr/>
+          <a:lstStyle/>
+          <a:p>
+            <a:endParaRPr lang="en-US"/>
+          </a:p>
+        </p:txBody>
       </p:sp>
       <p:sp>
         <p:nvSpPr>
@@ -2955,7 +2780,7 @@
           <a:bodyPr wrap="square" lIns="0" tIns="0" rIns="0" bIns="0" rtlCol="0" anchor="ctr"/>
           <a:lstStyle/>
           <a:p>
-            <a:pPr algn="ctr" indent="0" marL="0">
+            <a:pPr marL="0" indent="0" algn="ctr">
               <a:buNone/>
             </a:pPr>
             <a:r>
@@ -2994,7 +2819,7 @@
           <a:bodyPr wrap="square" lIns="0" tIns="0" rIns="0" bIns="0" rtlCol="0" anchor="ctr"/>
           <a:lstStyle/>
           <a:p>
-            <a:pPr algn="ctr" indent="0" marL="0">
+            <a:pPr marL="0" indent="0" algn="ctr">
               <a:lnSpc>
                 <a:spcPct val="115000"/>
               </a:lnSpc>
@@ -3014,7 +2839,7 @@
             <a:endParaRPr lang="en-US" sz="1300" dirty="0"/>
           </a:p>
           <a:p>
-            <a:pPr algn="ctr" indent="0" marL="0">
+            <a:pPr marL="0" indent="0" algn="ctr">
               <a:lnSpc>
                 <a:spcPct val="115000"/>
               </a:lnSpc>
@@ -3056,13 +2881,20 @@
           </a:solidFill>
           <a:ln/>
           <a:effectLst>
-            <a:outerShdw sx="100000" sy="100000" kx="0" ky="0" algn="bl" rotWithShape="0" blurRad="101600" dist="38100" dir="5400000">
+            <a:outerShdw blurRad="101600" dist="38100" dir="5400000" algn="bl" rotWithShape="0">
               <a:srgbClr val="1B4B4E">
                 <a:alpha val="15000"/>
               </a:srgbClr>
             </a:outerShdw>
           </a:effectLst>
         </p:spPr>
+        <p:txBody>
+          <a:bodyPr/>
+          <a:lstStyle/>
+          <a:p>
+            <a:endParaRPr lang="en-US"/>
+          </a:p>
+        </p:txBody>
       </p:sp>
       <p:sp>
         <p:nvSpPr>
@@ -3085,7 +2917,7 @@
           <a:bodyPr wrap="square" lIns="0" tIns="0" rIns="0" bIns="0" rtlCol="0" anchor="ctr"/>
           <a:lstStyle/>
           <a:p>
-            <a:pPr algn="ctr" indent="0" marL="0">
+            <a:pPr marL="0" indent="0" algn="ctr">
               <a:buNone/>
             </a:pPr>
             <a:r>
@@ -3124,7 +2956,7 @@
           <a:bodyPr wrap="square" lIns="0" tIns="0" rIns="0" bIns="0" rtlCol="0" anchor="ctr"/>
           <a:lstStyle/>
           <a:p>
-            <a:pPr algn="ctr" indent="0" marL="0">
+            <a:pPr marL="0" indent="0" algn="ctr">
               <a:lnSpc>
                 <a:spcPct val="115000"/>
               </a:lnSpc>
@@ -3144,7 +2976,7 @@
             <a:endParaRPr lang="en-US" sz="1300" dirty="0"/>
           </a:p>
           <a:p>
-            <a:pPr algn="ctr" indent="0" marL="0">
+            <a:pPr marL="0" indent="0" algn="ctr">
               <a:lnSpc>
                 <a:spcPct val="115000"/>
               </a:lnSpc>
@@ -3186,6 +3018,13 @@
           </a:solidFill>
           <a:ln/>
         </p:spPr>
+        <p:txBody>
+          <a:bodyPr/>
+          <a:lstStyle/>
+          <a:p>
+            <a:endParaRPr lang="en-US"/>
+          </a:p>
+        </p:txBody>
       </p:sp>
       <p:sp>
         <p:nvSpPr>
@@ -3208,7 +3047,7 @@
           <a:bodyPr wrap="square" lIns="0" tIns="0" rIns="0" bIns="0" rtlCol="0" anchor="ctr"/>
           <a:lstStyle/>
           <a:p>
-            <a:pPr indent="0" marL="0">
+            <a:pPr marL="0" indent="0">
               <a:buNone/>
             </a:pPr>
             <a:r>
@@ -3247,7 +3086,7 @@
           <a:bodyPr wrap="square" lIns="0" tIns="0" rIns="0" bIns="0" rtlCol="0" anchor="ctr"/>
           <a:lstStyle/>
           <a:p>
-            <a:pPr indent="0" marL="0">
+            <a:pPr marL="0" indent="0">
               <a:lnSpc>
                 <a:spcPct val="120000"/>
               </a:lnSpc>
@@ -3289,7 +3128,7 @@
           <a:bodyPr wrap="square" lIns="0" tIns="0" rIns="0" bIns="0" rtlCol="0" anchor="ctr"/>
           <a:lstStyle/>
           <a:p>
-            <a:pPr indent="0" marL="0">
+            <a:pPr marL="0" indent="0">
               <a:buNone/>
             </a:pPr>
             <a:r>
@@ -3328,7 +3167,7 @@
           <a:bodyPr wrap="square" lIns="0" tIns="0" rIns="0" bIns="0" rtlCol="0" anchor="ctr"/>
           <a:lstStyle/>
           <a:p>
-            <a:pPr algn="r" indent="0" marL="0">
+            <a:pPr marL="0" indent="0" algn="r">
               <a:buNone/>
             </a:pPr>
             <a:r>
@@ -3362,6 +3201,7 @@
         <a:solidFill>
           <a:srgbClr val="FFFFFF"/>
         </a:solidFill>
+        <a:effectLst/>
       </p:bgPr>
     </p:bg>
     <p:spTree>
@@ -3399,7 +3239,7 @@
           <a:bodyPr wrap="square" lIns="0" tIns="0" rIns="0" bIns="0" rtlCol="0" anchor="ctr"/>
           <a:lstStyle/>
           <a:p>
-            <a:pPr algn="l" indent="0" marL="0">
+            <a:pPr marL="0" indent="0" algn="l">
               <a:buNone/>
             </a:pPr>
             <a:r>
@@ -3438,6 +3278,13 @@
           </a:solidFill>
           <a:ln/>
         </p:spPr>
+        <p:txBody>
+          <a:bodyPr/>
+          <a:lstStyle/>
+          <a:p>
+            <a:endParaRPr lang="en-US"/>
+          </a:p>
+        </p:txBody>
       </p:sp>
       <p:sp>
         <p:nvSpPr>
@@ -3460,7 +3307,7 @@
           <a:bodyPr wrap="square" lIns="0" tIns="0" rIns="0" bIns="0" rtlCol="0" anchor="ctr"/>
           <a:lstStyle/>
           <a:p>
-            <a:pPr indent="0" marL="0">
+            <a:pPr marL="0" indent="0">
               <a:buNone/>
             </a:pPr>
             <a:r>
@@ -3590,6 +3437,13 @@
           </a:solidFill>
           <a:ln/>
         </p:spPr>
+        <p:txBody>
+          <a:bodyPr/>
+          <a:lstStyle/>
+          <a:p>
+            <a:endParaRPr lang="en-US"/>
+          </a:p>
+        </p:txBody>
       </p:sp>
       <p:sp>
         <p:nvSpPr>
@@ -3612,7 +3466,7 @@
           <a:bodyPr wrap="square" lIns="0" tIns="0" rIns="0" bIns="0" rtlCol="0" anchor="ctr"/>
           <a:lstStyle/>
           <a:p>
-            <a:pPr indent="0" marL="0">
+            <a:pPr marL="0" indent="0">
               <a:buNone/>
             </a:pPr>
             <a:r>
@@ -3742,7 +3596,7 @@
           <a:bodyPr wrap="square" lIns="0" tIns="0" rIns="0" bIns="0" rtlCol="0" anchor="ctr"/>
           <a:lstStyle/>
           <a:p>
-            <a:pPr indent="0" marL="0">
+            <a:pPr marL="0" indent="0">
               <a:buNone/>
             </a:pPr>
             <a:r>
@@ -3781,7 +3635,7 @@
           <a:bodyPr wrap="square" lIns="0" tIns="0" rIns="0" bIns="0" rtlCol="0" anchor="ctr"/>
           <a:lstStyle/>
           <a:p>
-            <a:pPr algn="r" indent="0" marL="0">
+            <a:pPr marL="0" indent="0" algn="r">
               <a:buNone/>
             </a:pPr>
             <a:r>
@@ -3815,6 +3669,7 @@
         <a:solidFill>
           <a:srgbClr val="FFFFFF"/>
         </a:solidFill>
+        <a:effectLst/>
       </p:bgPr>
     </p:bg>
     <p:spTree>
@@ -3852,7 +3707,7 @@
           <a:bodyPr wrap="square" lIns="0" tIns="0" rIns="0" bIns="0" rtlCol="0" anchor="ctr"/>
           <a:lstStyle/>
           <a:p>
-            <a:pPr algn="l" indent="0" marL="0">
+            <a:pPr marL="0" indent="0" algn="l">
               <a:buNone/>
             </a:pPr>
             <a:r>
@@ -3889,6 +3744,13 @@
           </a:solidFill>
           <a:ln/>
         </p:spPr>
+        <p:txBody>
+          <a:bodyPr/>
+          <a:lstStyle/>
+          <a:p>
+            <a:endParaRPr lang="en-US"/>
+          </a:p>
+        </p:txBody>
       </p:sp>
       <p:sp>
         <p:nvSpPr>
@@ -3911,7 +3773,7 @@
           <a:bodyPr wrap="square" lIns="0" tIns="0" rIns="0" bIns="0" rtlCol="0" anchor="ctr"/>
           <a:lstStyle/>
           <a:p>
-            <a:pPr algn="ctr" indent="0" marL="0">
+            <a:pPr marL="0" indent="0" algn="ctr">
               <a:buNone/>
             </a:pPr>
             <a:r>
@@ -3948,6 +3810,13 @@
           </a:solidFill>
           <a:ln/>
         </p:spPr>
+        <p:txBody>
+          <a:bodyPr/>
+          <a:lstStyle/>
+          <a:p>
+            <a:endParaRPr lang="en-US"/>
+          </a:p>
+        </p:txBody>
       </p:sp>
       <p:sp>
         <p:nvSpPr>
@@ -3970,7 +3839,7 @@
           <a:bodyPr wrap="square" lIns="0" tIns="0" rIns="0" bIns="0" rtlCol="0" anchor="ctr"/>
           <a:lstStyle/>
           <a:p>
-            <a:pPr indent="0" marL="0">
+            <a:pPr marL="0" indent="0">
               <a:lnSpc>
                 <a:spcPct val="110000"/>
               </a:lnSpc>
@@ -4012,7 +3881,7 @@
           <a:bodyPr wrap="square" lIns="0" tIns="0" rIns="0" bIns="0" rtlCol="0" anchor="ctr"/>
           <a:lstStyle/>
           <a:p>
-            <a:pPr indent="0" marL="0">
+            <a:pPr marL="0" indent="0">
               <a:lnSpc>
                 <a:spcPct val="120000"/>
               </a:lnSpc>
@@ -4052,6 +3921,13 @@
           </a:solidFill>
           <a:ln/>
         </p:spPr>
+        <p:txBody>
+          <a:bodyPr/>
+          <a:lstStyle/>
+          <a:p>
+            <a:endParaRPr lang="en-US"/>
+          </a:p>
+        </p:txBody>
       </p:sp>
       <p:sp>
         <p:nvSpPr>
@@ -4074,7 +3950,7 @@
           <a:bodyPr wrap="square" lIns="0" tIns="0" rIns="0" bIns="0" rtlCol="0" anchor="ctr"/>
           <a:lstStyle/>
           <a:p>
-            <a:pPr algn="ctr" indent="0" marL="0">
+            <a:pPr marL="0" indent="0" algn="ctr">
               <a:buNone/>
             </a:pPr>
             <a:r>
@@ -4111,6 +3987,13 @@
           </a:solidFill>
           <a:ln/>
         </p:spPr>
+        <p:txBody>
+          <a:bodyPr/>
+          <a:lstStyle/>
+          <a:p>
+            <a:endParaRPr lang="en-US"/>
+          </a:p>
+        </p:txBody>
       </p:sp>
       <p:sp>
         <p:nvSpPr>
@@ -4133,7 +4016,7 @@
           <a:bodyPr wrap="square" lIns="0" tIns="0" rIns="0" bIns="0" rtlCol="0" anchor="ctr"/>
           <a:lstStyle/>
           <a:p>
-            <a:pPr indent="0" marL="0">
+            <a:pPr marL="0" indent="0">
               <a:lnSpc>
                 <a:spcPct val="110000"/>
               </a:lnSpc>
@@ -4175,7 +4058,7 @@
           <a:bodyPr wrap="square" lIns="0" tIns="0" rIns="0" bIns="0" rtlCol="0" anchor="ctr"/>
           <a:lstStyle/>
           <a:p>
-            <a:pPr indent="0" marL="0">
+            <a:pPr marL="0" indent="0">
               <a:lnSpc>
                 <a:spcPct val="120000"/>
               </a:lnSpc>
@@ -4215,6 +4098,13 @@
           </a:solidFill>
           <a:ln/>
         </p:spPr>
+        <p:txBody>
+          <a:bodyPr/>
+          <a:lstStyle/>
+          <a:p>
+            <a:endParaRPr lang="en-US"/>
+          </a:p>
+        </p:txBody>
       </p:sp>
       <p:sp>
         <p:nvSpPr>
@@ -4237,7 +4127,7 @@
           <a:bodyPr wrap="square" lIns="0" tIns="0" rIns="0" bIns="0" rtlCol="0" anchor="ctr"/>
           <a:lstStyle/>
           <a:p>
-            <a:pPr algn="ctr" indent="0" marL="0">
+            <a:pPr marL="0" indent="0" algn="ctr">
               <a:buNone/>
             </a:pPr>
             <a:r>
@@ -4274,6 +4164,13 @@
           </a:solidFill>
           <a:ln/>
         </p:spPr>
+        <p:txBody>
+          <a:bodyPr/>
+          <a:lstStyle/>
+          <a:p>
+            <a:endParaRPr lang="en-US"/>
+          </a:p>
+        </p:txBody>
       </p:sp>
       <p:sp>
         <p:nvSpPr>
@@ -4296,7 +4193,7 @@
           <a:bodyPr wrap="square" lIns="0" tIns="0" rIns="0" bIns="0" rtlCol="0" anchor="ctr"/>
           <a:lstStyle/>
           <a:p>
-            <a:pPr indent="0" marL="0">
+            <a:pPr marL="0" indent="0">
               <a:lnSpc>
                 <a:spcPct val="110000"/>
               </a:lnSpc>
@@ -4338,7 +4235,7 @@
           <a:bodyPr wrap="square" lIns="0" tIns="0" rIns="0" bIns="0" rtlCol="0" anchor="ctr"/>
           <a:lstStyle/>
           <a:p>
-            <a:pPr indent="0" marL="0">
+            <a:pPr marL="0" indent="0">
               <a:lnSpc>
                 <a:spcPct val="120000"/>
               </a:lnSpc>
@@ -4378,6 +4275,13 @@
           </a:solidFill>
           <a:ln/>
         </p:spPr>
+        <p:txBody>
+          <a:bodyPr/>
+          <a:lstStyle/>
+          <a:p>
+            <a:endParaRPr lang="en-US"/>
+          </a:p>
+        </p:txBody>
       </p:sp>
       <p:sp>
         <p:nvSpPr>
@@ -4400,7 +4304,7 @@
           <a:bodyPr wrap="square" lIns="0" tIns="0" rIns="0" bIns="0" rtlCol="0" anchor="ctr"/>
           <a:lstStyle/>
           <a:p>
-            <a:pPr algn="ctr" indent="0" marL="0">
+            <a:pPr marL="0" indent="0" algn="ctr">
               <a:buNone/>
             </a:pPr>
             <a:r>
@@ -4439,7 +4343,7 @@
           <a:bodyPr wrap="square" lIns="0" tIns="0" rIns="0" bIns="0" rtlCol="0" anchor="ctr"/>
           <a:lstStyle/>
           <a:p>
-            <a:pPr indent="0" marL="0">
+            <a:pPr marL="0" indent="0">
               <a:lnSpc>
                 <a:spcPct val="110000"/>
               </a:lnSpc>
@@ -4481,7 +4385,7 @@
           <a:bodyPr wrap="square" lIns="0" tIns="0" rIns="0" bIns="0" rtlCol="0" anchor="ctr"/>
           <a:lstStyle/>
           <a:p>
-            <a:pPr indent="0" marL="0">
+            <a:pPr marL="0" indent="0">
               <a:lnSpc>
                 <a:spcPct val="120000"/>
               </a:lnSpc>
@@ -4523,6 +4427,13 @@
           </a:solidFill>
           <a:ln/>
         </p:spPr>
+        <p:txBody>
+          <a:bodyPr/>
+          <a:lstStyle/>
+          <a:p>
+            <a:endParaRPr lang="en-US"/>
+          </a:p>
+        </p:txBody>
       </p:sp>
       <p:sp>
         <p:nvSpPr>
@@ -4545,7 +4456,7 @@
           <a:bodyPr wrap="square" lIns="0" tIns="0" rIns="0" bIns="0" rtlCol="0" anchor="ctr"/>
           <a:lstStyle/>
           <a:p>
-            <a:pPr indent="0" marL="0">
+            <a:pPr marL="0" indent="0">
               <a:lnSpc>
                 <a:spcPct val="120000"/>
               </a:lnSpc>
@@ -4587,7 +4498,7 @@
           <a:bodyPr wrap="square" lIns="0" tIns="0" rIns="0" bIns="0" rtlCol="0" anchor="ctr"/>
           <a:lstStyle/>
           <a:p>
-            <a:pPr algn="r" indent="0" marL="0">
+            <a:pPr marL="0" indent="0" algn="r">
               <a:buNone/>
             </a:pPr>
             <a:r>
@@ -4621,6 +4532,7 @@
         <a:solidFill>
           <a:srgbClr val="FFFFFF"/>
         </a:solidFill>
+        <a:effectLst/>
       </p:bgPr>
     </p:bg>
     <p:spTree>
@@ -4658,7 +4570,7 @@
           <a:bodyPr wrap="square" lIns="0" tIns="0" rIns="0" bIns="0" rtlCol="0" anchor="ctr"/>
           <a:lstStyle/>
           <a:p>
-            <a:pPr algn="l" indent="0" marL="0">
+            <a:pPr marL="0" indent="0" algn="l">
               <a:buNone/>
             </a:pPr>
             <a:r>
@@ -4697,6 +4609,13 @@
           </a:solidFill>
           <a:ln/>
         </p:spPr>
+        <p:txBody>
+          <a:bodyPr/>
+          <a:lstStyle/>
+          <a:p>
+            <a:endParaRPr lang="en-US"/>
+          </a:p>
+        </p:txBody>
       </p:sp>
       <p:sp>
         <p:nvSpPr>
@@ -4719,7 +4638,7 @@
           <a:bodyPr wrap="square" lIns="0" tIns="0" rIns="0" bIns="0" rtlCol="0" anchor="ctr"/>
           <a:lstStyle/>
           <a:p>
-            <a:pPr algn="ctr" indent="0" marL="0">
+            <a:pPr marL="0" indent="0" algn="ctr">
               <a:buNone/>
             </a:pPr>
             <a:r>
@@ -4758,7 +4677,7 @@
           <a:bodyPr wrap="square" lIns="0" tIns="0" rIns="0" bIns="0" rtlCol="0" anchor="ctr"/>
           <a:lstStyle/>
           <a:p>
-            <a:pPr indent="0" marL="0">
+            <a:pPr marL="0" indent="0">
               <a:lnSpc>
                 <a:spcPct val="110000"/>
               </a:lnSpc>
@@ -4800,7 +4719,7 @@
           <a:bodyPr wrap="square" lIns="0" tIns="0" rIns="0" bIns="0" rtlCol="0" anchor="ctr"/>
           <a:lstStyle/>
           <a:p>
-            <a:pPr indent="0" marL="0">
+            <a:pPr marL="0" indent="0">
               <a:lnSpc>
                 <a:spcPct val="115000"/>
               </a:lnSpc>
@@ -4842,6 +4761,13 @@
           </a:solidFill>
           <a:ln/>
         </p:spPr>
+        <p:txBody>
+          <a:bodyPr/>
+          <a:lstStyle/>
+          <a:p>
+            <a:endParaRPr lang="en-US"/>
+          </a:p>
+        </p:txBody>
       </p:sp>
       <p:sp>
         <p:nvSpPr>
@@ -4864,7 +4790,7 @@
           <a:bodyPr wrap="square" lIns="0" tIns="0" rIns="0" bIns="0" rtlCol="0" anchor="ctr"/>
           <a:lstStyle/>
           <a:p>
-            <a:pPr algn="ctr" indent="0" marL="0">
+            <a:pPr marL="0" indent="0" algn="ctr">
               <a:buNone/>
             </a:pPr>
             <a:r>
@@ -4903,7 +4829,7 @@
           <a:bodyPr wrap="square" lIns="0" tIns="0" rIns="0" bIns="0" rtlCol="0" anchor="ctr"/>
           <a:lstStyle/>
           <a:p>
-            <a:pPr indent="0" marL="0">
+            <a:pPr marL="0" indent="0">
               <a:lnSpc>
                 <a:spcPct val="110000"/>
               </a:lnSpc>
@@ -4945,7 +4871,7 @@
           <a:bodyPr wrap="square" lIns="0" tIns="0" rIns="0" bIns="0" rtlCol="0" anchor="ctr"/>
           <a:lstStyle/>
           <a:p>
-            <a:pPr indent="0" marL="0">
+            <a:pPr marL="0" indent="0">
               <a:lnSpc>
                 <a:spcPct val="115000"/>
               </a:lnSpc>
@@ -4987,6 +4913,13 @@
           </a:solidFill>
           <a:ln/>
         </p:spPr>
+        <p:txBody>
+          <a:bodyPr/>
+          <a:lstStyle/>
+          <a:p>
+            <a:endParaRPr lang="en-US"/>
+          </a:p>
+        </p:txBody>
       </p:sp>
       <p:sp>
         <p:nvSpPr>
@@ -5009,7 +4942,7 @@
           <a:bodyPr wrap="square" lIns="0" tIns="0" rIns="0" bIns="0" rtlCol="0" anchor="ctr"/>
           <a:lstStyle/>
           <a:p>
-            <a:pPr algn="ctr" indent="0" marL="0">
+            <a:pPr marL="0" indent="0" algn="ctr">
               <a:buNone/>
             </a:pPr>
             <a:r>
@@ -5048,7 +4981,7 @@
           <a:bodyPr wrap="square" lIns="0" tIns="0" rIns="0" bIns="0" rtlCol="0" anchor="ctr"/>
           <a:lstStyle/>
           <a:p>
-            <a:pPr indent="0" marL="0">
+            <a:pPr marL="0" indent="0">
               <a:lnSpc>
                 <a:spcPct val="110000"/>
               </a:lnSpc>
@@ -5090,7 +5023,7 @@
           <a:bodyPr wrap="square" lIns="0" tIns="0" rIns="0" bIns="0" rtlCol="0" anchor="ctr"/>
           <a:lstStyle/>
           <a:p>
-            <a:pPr indent="0" marL="0">
+            <a:pPr marL="0" indent="0">
               <a:lnSpc>
                 <a:spcPct val="115000"/>
               </a:lnSpc>
@@ -5132,6 +5065,13 @@
           </a:solidFill>
           <a:ln/>
         </p:spPr>
+        <p:txBody>
+          <a:bodyPr/>
+          <a:lstStyle/>
+          <a:p>
+            <a:endParaRPr lang="en-US"/>
+          </a:p>
+        </p:txBody>
       </p:sp>
       <p:sp>
         <p:nvSpPr>
@@ -5154,7 +5094,7 @@
           <a:bodyPr wrap="square" lIns="0" tIns="0" rIns="0" bIns="0" rtlCol="0" anchor="ctr"/>
           <a:lstStyle/>
           <a:p>
-            <a:pPr algn="ctr" indent="0" marL="0">
+            <a:pPr marL="0" indent="0" algn="ctr">
               <a:buNone/>
             </a:pPr>
             <a:r>
@@ -5193,7 +5133,7 @@
           <a:bodyPr wrap="square" lIns="0" tIns="0" rIns="0" bIns="0" rtlCol="0" anchor="ctr"/>
           <a:lstStyle/>
           <a:p>
-            <a:pPr indent="0" marL="0">
+            <a:pPr marL="0" indent="0">
               <a:lnSpc>
                 <a:spcPct val="110000"/>
               </a:lnSpc>
@@ -5235,7 +5175,7 @@
           <a:bodyPr wrap="square" lIns="0" tIns="0" rIns="0" bIns="0" rtlCol="0" anchor="ctr"/>
           <a:lstStyle/>
           <a:p>
-            <a:pPr indent="0" marL="0">
+            <a:pPr marL="0" indent="0">
               <a:lnSpc>
                 <a:spcPct val="115000"/>
               </a:lnSpc>
@@ -5277,7 +5217,7 @@
           <a:bodyPr wrap="square" lIns="0" tIns="0" rIns="0" bIns="0" rtlCol="0" anchor="ctr"/>
           <a:lstStyle/>
           <a:p>
-            <a:pPr indent="0" marL="0">
+            <a:pPr marL="0" indent="0">
               <a:buNone/>
             </a:pPr>
             <a:r>
@@ -5316,7 +5256,7 @@
           <a:bodyPr wrap="square" lIns="0" tIns="0" rIns="0" bIns="0" rtlCol="0" anchor="ctr"/>
           <a:lstStyle/>
           <a:p>
-            <a:pPr algn="r" indent="0" marL="0">
+            <a:pPr marL="0" indent="0" algn="r">
               <a:buNone/>
             </a:pPr>
             <a:r>
@@ -5350,6 +5290,7 @@
         <a:solidFill>
           <a:srgbClr val="FFFFFF"/>
         </a:solidFill>
+        <a:effectLst/>
       </p:bgPr>
     </p:bg>
     <p:spTree>
@@ -5387,7 +5328,7 @@
           <a:bodyPr wrap="square" lIns="0" tIns="0" rIns="0" bIns="0" rtlCol="0" anchor="ctr"/>
           <a:lstStyle/>
           <a:p>
-            <a:pPr algn="l" indent="0" marL="0">
+            <a:pPr marL="0" indent="0" algn="l">
               <a:buNone/>
             </a:pPr>
             <a:r>
@@ -5421,17 +5362,41 @@
         </p:nvGraphicFramePr>
         <p:xfrm>
           <a:off x="548640" y="1508760"/>
-          <a:ext cx="11064240" cy="4206240"/>
+          <a:ext cx="11064240" cy="4023360"/>
         </p:xfrm>
         <a:graphic>
           <a:graphicData uri="http://schemas.openxmlformats.org/drawingml/2006/table">
             <a:tbl>
               <a:tblPr/>
               <a:tblGrid>
-                <a:gridCol w="1554480"/>
-                <a:gridCol w="2103120"/>
-                <a:gridCol w="1005840"/>
-                <a:gridCol w="6400800"/>
+                <a:gridCol w="1554480">
+                  <a:extLst>
+                    <a:ext uri="{9D8B030D-6E8A-4147-A177-3AD203B41FA5}">
+                      <a16:colId xmlns:a16="http://schemas.microsoft.com/office/drawing/2014/main" val="20000"/>
+                    </a:ext>
+                  </a:extLst>
+                </a:gridCol>
+                <a:gridCol w="2103120">
+                  <a:extLst>
+                    <a:ext uri="{9D8B030D-6E8A-4147-A177-3AD203B41FA5}">
+                      <a16:colId xmlns:a16="http://schemas.microsoft.com/office/drawing/2014/main" val="20001"/>
+                    </a:ext>
+                  </a:extLst>
+                </a:gridCol>
+                <a:gridCol w="1005840">
+                  <a:extLst>
+                    <a:ext uri="{9D8B030D-6E8A-4147-A177-3AD203B41FA5}">
+                      <a16:colId xmlns:a16="http://schemas.microsoft.com/office/drawing/2014/main" val="20002"/>
+                    </a:ext>
+                  </a:extLst>
+                </a:gridCol>
+                <a:gridCol w="6400800">
+                  <a:extLst>
+                    <a:ext uri="{9D8B030D-6E8A-4147-A177-3AD203B41FA5}">
+                      <a16:colId xmlns:a16="http://schemas.microsoft.com/office/drawing/2014/main" val="20003"/>
+                    </a:ext>
+                  </a:extLst>
+                </a:gridCol>
               </a:tblGrid>
               <a:tr h="502920">
                 <a:tc>
@@ -5439,7 +5404,7 @@
                     <a:bodyPr/>
                     <a:lstStyle/>
                     <a:p>
-                      <a:pPr indent="0" marL="0">
+                      <a:pPr marL="0" indent="0">
                         <a:buNone/>
                       </a:pPr>
                       <a:r>
@@ -5460,7 +5425,7 @@
                       </a:endParaRPr>
                     </a:p>
                   </a:txBody>
-                  <a:tcPr marL="91440" marR="91440" marT="45720" marB="45720" anchor="ctr">
+                  <a:tcPr anchor="ctr">
                     <a:lnL w="12700" cap="flat" cmpd="sng" algn="ctr">
                       <a:solidFill>
                         <a:srgbClr val="D9EDEA"/>
@@ -5507,7 +5472,7 @@
                     <a:bodyPr/>
                     <a:lstStyle/>
                     <a:p>
-                      <a:pPr indent="0" marL="0">
+                      <a:pPr marL="0" indent="0">
                         <a:buNone/>
                       </a:pPr>
                       <a:r>
@@ -5528,7 +5493,7 @@
                       </a:endParaRPr>
                     </a:p>
                   </a:txBody>
-                  <a:tcPr marL="91440" marR="91440" marT="45720" marB="45720" anchor="ctr">
+                  <a:tcPr anchor="ctr">
                     <a:lnL w="12700" cap="flat" cmpd="sng" algn="ctr">
                       <a:solidFill>
                         <a:srgbClr val="D9EDEA"/>
@@ -5575,7 +5540,7 @@
                     <a:bodyPr/>
                     <a:lstStyle/>
                     <a:p>
-                      <a:pPr indent="0" marL="0">
+                      <a:pPr marL="0" indent="0">
                         <a:buNone/>
                       </a:pPr>
                       <a:r>
@@ -5596,7 +5561,7 @@
                       </a:endParaRPr>
                     </a:p>
                   </a:txBody>
-                  <a:tcPr marL="91440" marR="91440" marT="45720" marB="45720" anchor="ctr">
+                  <a:tcPr anchor="ctr">
                     <a:lnL w="12700" cap="flat" cmpd="sng" algn="ctr">
                       <a:solidFill>
                         <a:srgbClr val="D9EDEA"/>
@@ -5643,7 +5608,7 @@
                     <a:bodyPr/>
                     <a:lstStyle/>
                     <a:p>
-                      <a:pPr indent="0" marL="0">
+                      <a:pPr marL="0" indent="0">
                         <a:buNone/>
                       </a:pPr>
                       <a:r>
@@ -5664,7 +5629,7 @@
                       </a:endParaRPr>
                     </a:p>
                   </a:txBody>
-                  <a:tcPr marL="91440" marR="91440" marT="45720" marB="45720" anchor="ctr">
+                  <a:tcPr anchor="ctr">
                     <a:lnL w="12700" cap="flat" cmpd="sng" algn="ctr">
                       <a:solidFill>
                         <a:srgbClr val="D9EDEA"/>
@@ -5706,6 +5671,11 @@
                     </a:solidFill>
                   </a:tcPr>
                 </a:tc>
+                <a:extLst>
+                  <a:ext uri="{0D108BD9-81ED-4DB2-BD59-A6C34878D82A}">
+                    <a16:rowId xmlns:a16="http://schemas.microsoft.com/office/drawing/2014/main" val="10000"/>
+                  </a:ext>
+                </a:extLst>
               </a:tr>
               <a:tr h="822960">
                 <a:tc>
@@ -5713,7 +5683,7 @@
                     <a:bodyPr/>
                     <a:lstStyle/>
                     <a:p>
-                      <a:pPr indent="0" marL="0">
+                      <a:pPr marL="0" indent="0">
                         <a:buNone/>
                       </a:pPr>
                       <a:r>
@@ -5734,7 +5704,7 @@
                       </a:endParaRPr>
                     </a:p>
                   </a:txBody>
-                  <a:tcPr marL="91440" marR="91440" marT="45720" marB="45720" anchor="ctr">
+                  <a:tcPr anchor="ctr">
                     <a:lnL w="12700" cap="flat" cmpd="sng" algn="ctr">
                       <a:solidFill>
                         <a:srgbClr val="D9EDEA"/>
@@ -5778,7 +5748,7 @@
                     <a:bodyPr/>
                     <a:lstStyle/>
                     <a:p>
-                      <a:pPr indent="0" marL="0">
+                      <a:pPr marL="0" indent="0">
                         <a:buNone/>
                       </a:pPr>
                       <a:r>
@@ -5799,7 +5769,7 @@
                       </a:endParaRPr>
                     </a:p>
                   </a:txBody>
-                  <a:tcPr marL="91440" marR="91440" marT="45720" marB="45720" anchor="ctr">
+                  <a:tcPr anchor="ctr">
                     <a:lnL w="12700" cap="flat" cmpd="sng" algn="ctr">
                       <a:solidFill>
                         <a:srgbClr val="D9EDEA"/>
@@ -5843,7 +5813,7 @@
                     <a:bodyPr/>
                     <a:lstStyle/>
                     <a:p>
-                      <a:pPr indent="0" marL="0">
+                      <a:pPr marL="0" indent="0">
                         <a:buNone/>
                       </a:pPr>
                       <a:r>
@@ -5864,7 +5834,7 @@
                       </a:endParaRPr>
                     </a:p>
                   </a:txBody>
-                  <a:tcPr marL="91440" marR="91440" marT="45720" marB="45720" anchor="ctr">
+                  <a:tcPr anchor="ctr">
                     <a:lnL w="12700" cap="flat" cmpd="sng" algn="ctr">
                       <a:solidFill>
                         <a:srgbClr val="D9EDEA"/>
@@ -5908,7 +5878,7 @@
                     <a:bodyPr/>
                     <a:lstStyle/>
                     <a:p>
-                      <a:pPr indent="0" marL="0">
+                      <a:pPr marL="0" indent="0">
                         <a:buNone/>
                       </a:pPr>
                       <a:r>
@@ -5929,7 +5899,7 @@
                       </a:endParaRPr>
                     </a:p>
                   </a:txBody>
-                  <a:tcPr marL="91440" marR="91440" marT="45720" marB="45720" anchor="ctr">
+                  <a:tcPr anchor="ctr">
                     <a:lnL w="12700" cap="flat" cmpd="sng" algn="ctr">
                       <a:solidFill>
                         <a:srgbClr val="D9EDEA"/>
@@ -5968,6 +5938,11 @@
                     </a:lnB>
                   </a:tcPr>
                 </a:tc>
+                <a:extLst>
+                  <a:ext uri="{0D108BD9-81ED-4DB2-BD59-A6C34878D82A}">
+                    <a16:rowId xmlns:a16="http://schemas.microsoft.com/office/drawing/2014/main" val="10001"/>
+                  </a:ext>
+                </a:extLst>
               </a:tr>
               <a:tr h="914400">
                 <a:tc>
@@ -5975,7 +5950,7 @@
                     <a:bodyPr/>
                     <a:lstStyle/>
                     <a:p>
-                      <a:pPr indent="0" marL="0">
+                      <a:pPr marL="0" indent="0">
                         <a:buNone/>
                       </a:pPr>
                       <a:r>
@@ -5996,7 +5971,7 @@
                       </a:endParaRPr>
                     </a:p>
                   </a:txBody>
-                  <a:tcPr marL="91440" marR="91440" marT="45720" marB="45720" anchor="ctr">
+                  <a:tcPr anchor="ctr">
                     <a:lnL w="12700" cap="flat" cmpd="sng" algn="ctr">
                       <a:solidFill>
                         <a:srgbClr val="D9EDEA"/>
@@ -6040,7 +6015,7 @@
                     <a:bodyPr/>
                     <a:lstStyle/>
                     <a:p>
-                      <a:pPr indent="0" marL="0">
+                      <a:pPr marL="0" indent="0">
                         <a:buNone/>
                       </a:pPr>
                       <a:r>
@@ -6061,7 +6036,7 @@
                       </a:endParaRPr>
                     </a:p>
                   </a:txBody>
-                  <a:tcPr marL="91440" marR="91440" marT="45720" marB="45720" anchor="ctr">
+                  <a:tcPr anchor="ctr">
                     <a:lnL w="12700" cap="flat" cmpd="sng" algn="ctr">
                       <a:solidFill>
                         <a:srgbClr val="D9EDEA"/>
@@ -6105,7 +6080,7 @@
                     <a:bodyPr/>
                     <a:lstStyle/>
                     <a:p>
-                      <a:pPr indent="0" marL="0">
+                      <a:pPr marL="0" indent="0">
                         <a:buNone/>
                       </a:pPr>
                       <a:r>
@@ -6126,7 +6101,7 @@
                       </a:endParaRPr>
                     </a:p>
                   </a:txBody>
-                  <a:tcPr marL="91440" marR="91440" marT="45720" marB="45720" anchor="ctr">
+                  <a:tcPr anchor="ctr">
                     <a:lnL w="12700" cap="flat" cmpd="sng" algn="ctr">
                       <a:solidFill>
                         <a:srgbClr val="D9EDEA"/>
@@ -6170,7 +6145,7 @@
                     <a:bodyPr/>
                     <a:lstStyle/>
                     <a:p>
-                      <a:pPr indent="0" marL="0">
+                      <a:pPr marL="0" indent="0">
                         <a:buNone/>
                       </a:pPr>
                       <a:r>
@@ -6191,7 +6166,7 @@
                       </a:endParaRPr>
                     </a:p>
                   </a:txBody>
-                  <a:tcPr marL="91440" marR="91440" marT="45720" marB="45720" anchor="ctr">
+                  <a:tcPr anchor="ctr">
                     <a:lnL w="12700" cap="flat" cmpd="sng" algn="ctr">
                       <a:solidFill>
                         <a:srgbClr val="D9EDEA"/>
@@ -6230,6 +6205,11 @@
                     </a:lnB>
                   </a:tcPr>
                 </a:tc>
+                <a:extLst>
+                  <a:ext uri="{0D108BD9-81ED-4DB2-BD59-A6C34878D82A}">
+                    <a16:rowId xmlns:a16="http://schemas.microsoft.com/office/drawing/2014/main" val="10002"/>
+                  </a:ext>
+                </a:extLst>
               </a:tr>
               <a:tr h="914400">
                 <a:tc>
@@ -6237,7 +6217,7 @@
                     <a:bodyPr/>
                     <a:lstStyle/>
                     <a:p>
-                      <a:pPr indent="0" marL="0">
+                      <a:pPr marL="0" indent="0">
                         <a:buNone/>
                       </a:pPr>
                       <a:r>
@@ -6258,7 +6238,7 @@
                       </a:endParaRPr>
                     </a:p>
                   </a:txBody>
-                  <a:tcPr marL="91440" marR="91440" marT="45720" marB="45720" anchor="ctr">
+                  <a:tcPr anchor="ctr">
                     <a:lnL w="12700" cap="flat" cmpd="sng" algn="ctr">
                       <a:solidFill>
                         <a:srgbClr val="D9EDEA"/>
@@ -6302,7 +6282,7 @@
                     <a:bodyPr/>
                     <a:lstStyle/>
                     <a:p>
-                      <a:pPr indent="0" marL="0">
+                      <a:pPr marL="0" indent="0">
                         <a:buNone/>
                       </a:pPr>
                       <a:r>
@@ -6323,7 +6303,7 @@
                       </a:endParaRPr>
                     </a:p>
                   </a:txBody>
-                  <a:tcPr marL="91440" marR="91440" marT="45720" marB="45720" anchor="ctr">
+                  <a:tcPr anchor="ctr">
                     <a:lnL w="12700" cap="flat" cmpd="sng" algn="ctr">
                       <a:solidFill>
                         <a:srgbClr val="D9EDEA"/>
@@ -6367,7 +6347,7 @@
                     <a:bodyPr/>
                     <a:lstStyle/>
                     <a:p>
-                      <a:pPr indent="0" marL="0">
+                      <a:pPr marL="0" indent="0">
                         <a:buNone/>
                       </a:pPr>
                       <a:r>
@@ -6388,7 +6368,7 @@
                       </a:endParaRPr>
                     </a:p>
                   </a:txBody>
-                  <a:tcPr marL="91440" marR="91440" marT="45720" marB="45720" anchor="ctr">
+                  <a:tcPr anchor="ctr">
                     <a:lnL w="12700" cap="flat" cmpd="sng" algn="ctr">
                       <a:solidFill>
                         <a:srgbClr val="D9EDEA"/>
@@ -6432,7 +6412,7 @@
                     <a:bodyPr/>
                     <a:lstStyle/>
                     <a:p>
-                      <a:pPr indent="0" marL="0">
+                      <a:pPr marL="0" indent="0">
                         <a:buNone/>
                       </a:pPr>
                       <a:r>
@@ -6453,7 +6433,7 @@
                       </a:endParaRPr>
                     </a:p>
                   </a:txBody>
-                  <a:tcPr marL="91440" marR="91440" marT="45720" marB="45720" anchor="ctr">
+                  <a:tcPr anchor="ctr">
                     <a:lnL w="12700" cap="flat" cmpd="sng" algn="ctr">
                       <a:solidFill>
                         <a:srgbClr val="D9EDEA"/>
@@ -6492,6 +6472,11 @@
                     </a:lnB>
                   </a:tcPr>
                 </a:tc>
+                <a:extLst>
+                  <a:ext uri="{0D108BD9-81ED-4DB2-BD59-A6C34878D82A}">
+                    <a16:rowId xmlns:a16="http://schemas.microsoft.com/office/drawing/2014/main" val="10003"/>
+                  </a:ext>
+                </a:extLst>
               </a:tr>
               <a:tr h="868680">
                 <a:tc>
@@ -6499,7 +6484,7 @@
                     <a:bodyPr/>
                     <a:lstStyle/>
                     <a:p>
-                      <a:pPr indent="0" marL="0">
+                      <a:pPr marL="0" indent="0">
                         <a:buNone/>
                       </a:pPr>
                       <a:r>
@@ -6520,7 +6505,7 @@
                       </a:endParaRPr>
                     </a:p>
                   </a:txBody>
-                  <a:tcPr marL="91440" marR="91440" marT="45720" marB="45720" anchor="ctr">
+                  <a:tcPr anchor="ctr">
                     <a:lnL w="12700" cap="flat" cmpd="sng" algn="ctr">
                       <a:solidFill>
                         <a:srgbClr val="D9EDEA"/>
@@ -6564,7 +6549,7 @@
                     <a:bodyPr/>
                     <a:lstStyle/>
                     <a:p>
-                      <a:pPr indent="0" marL="0">
+                      <a:pPr marL="0" indent="0">
                         <a:buNone/>
                       </a:pPr>
                       <a:r>
@@ -6585,7 +6570,7 @@
                       </a:endParaRPr>
                     </a:p>
                   </a:txBody>
-                  <a:tcPr marL="91440" marR="91440" marT="45720" marB="45720" anchor="ctr">
+                  <a:tcPr anchor="ctr">
                     <a:lnL w="12700" cap="flat" cmpd="sng" algn="ctr">
                       <a:solidFill>
                         <a:srgbClr val="D9EDEA"/>
@@ -6629,7 +6614,7 @@
                     <a:bodyPr/>
                     <a:lstStyle/>
                     <a:p>
-                      <a:pPr indent="0" marL="0">
+                      <a:pPr marL="0" indent="0">
                         <a:buNone/>
                       </a:pPr>
                       <a:r>
@@ -6650,7 +6635,7 @@
                       </a:endParaRPr>
                     </a:p>
                   </a:txBody>
-                  <a:tcPr marL="91440" marR="91440" marT="45720" marB="45720" anchor="ctr">
+                  <a:tcPr anchor="ctr">
                     <a:lnL w="12700" cap="flat" cmpd="sng" algn="ctr">
                       <a:solidFill>
                         <a:srgbClr val="D9EDEA"/>
@@ -6694,7 +6679,7 @@
                     <a:bodyPr/>
                     <a:lstStyle/>
                     <a:p>
-                      <a:pPr indent="0" marL="0">
+                      <a:pPr marL="0" indent="0">
                         <a:buNone/>
                       </a:pPr>
                       <a:r>
@@ -6715,7 +6700,7 @@
                       </a:endParaRPr>
                     </a:p>
                   </a:txBody>
-                  <a:tcPr marL="91440" marR="91440" marT="45720" marB="45720" anchor="ctr">
+                  <a:tcPr anchor="ctr">
                     <a:lnL w="12700" cap="flat" cmpd="sng" algn="ctr">
                       <a:solidFill>
                         <a:srgbClr val="D9EDEA"/>
@@ -6754,6 +6739,11 @@
                     </a:lnB>
                   </a:tcPr>
                 </a:tc>
+                <a:extLst>
+                  <a:ext uri="{0D108BD9-81ED-4DB2-BD59-A6C34878D82A}">
+                    <a16:rowId xmlns:a16="http://schemas.microsoft.com/office/drawing/2014/main" val="10004"/>
+                  </a:ext>
+                </a:extLst>
               </a:tr>
             </a:tbl>
           </a:graphicData>
@@ -6780,7 +6770,7 @@
           <a:bodyPr wrap="square" lIns="0" tIns="0" rIns="0" bIns="0" rtlCol="0" anchor="ctr"/>
           <a:lstStyle/>
           <a:p>
-            <a:pPr indent="0" marL="0">
+            <a:pPr marL="0" indent="0">
               <a:buNone/>
             </a:pPr>
             <a:r>
@@ -6819,7 +6809,7 @@
           <a:bodyPr wrap="square" lIns="0" tIns="0" rIns="0" bIns="0" rtlCol="0" anchor="ctr"/>
           <a:lstStyle/>
           <a:p>
-            <a:pPr indent="0" marL="0">
+            <a:pPr marL="0" indent="0">
               <a:buNone/>
             </a:pPr>
             <a:r>
@@ -6858,7 +6848,7 @@
           <a:bodyPr wrap="square" lIns="0" tIns="0" rIns="0" bIns="0" rtlCol="0" anchor="ctr"/>
           <a:lstStyle/>
           <a:p>
-            <a:pPr algn="r" indent="0" marL="0">
+            <a:pPr marL="0" indent="0" algn="r">
               <a:buNone/>
             </a:pPr>
             <a:r>
@@ -6892,6 +6882,7 @@
         <a:solidFill>
           <a:srgbClr val="0B2E33"/>
         </a:solidFill>
+        <a:effectLst/>
       </p:bgPr>
     </p:bg>
     <p:spTree>
@@ -6929,7 +6920,7 @@
           <a:bodyPr wrap="square" lIns="0" tIns="0" rIns="0" bIns="0" rtlCol="0" anchor="ctr"/>
           <a:lstStyle/>
           <a:p>
-            <a:pPr algn="l" indent="0" marL="0">
+            <a:pPr marL="0" indent="0" algn="l">
               <a:buNone/>
             </a:pPr>
             <a:r>
@@ -6968,6 +6959,13 @@
           </a:solidFill>
           <a:ln/>
         </p:spPr>
+        <p:txBody>
+          <a:bodyPr/>
+          <a:lstStyle/>
+          <a:p>
+            <a:endParaRPr lang="en-US"/>
+          </a:p>
+        </p:txBody>
       </p:sp>
       <p:sp>
         <p:nvSpPr>
@@ -6990,7 +6988,7 @@
           <a:bodyPr wrap="square" lIns="0" tIns="0" rIns="0" bIns="0" rtlCol="0" anchor="ctr"/>
           <a:lstStyle/>
           <a:p>
-            <a:pPr indent="0" marL="0">
+            <a:pPr marL="0" indent="0">
               <a:buNone/>
             </a:pPr>
             <a:r>
@@ -7123,6 +7121,13 @@
           </a:solidFill>
           <a:ln/>
         </p:spPr>
+        <p:txBody>
+          <a:bodyPr/>
+          <a:lstStyle/>
+          <a:p>
+            <a:endParaRPr lang="en-US"/>
+          </a:p>
+        </p:txBody>
       </p:sp>
       <p:sp>
         <p:nvSpPr>
@@ -7145,7 +7150,7 @@
           <a:bodyPr wrap="square" lIns="0" tIns="0" rIns="0" bIns="0" rtlCol="0" anchor="ctr"/>
           <a:lstStyle/>
           <a:p>
-            <a:pPr indent="0" marL="0">
+            <a:pPr marL="0" indent="0">
               <a:buNone/>
             </a:pPr>
             <a:r>
@@ -7278,7 +7283,7 @@
           <a:bodyPr wrap="square" lIns="0" tIns="0" rIns="0" bIns="0" rtlCol="0" anchor="ctr"/>
           <a:lstStyle/>
           <a:p>
-            <a:pPr indent="0" marL="0">
+            <a:pPr marL="0" indent="0">
               <a:buNone/>
             </a:pPr>
             <a:r>
@@ -7317,7 +7322,7 @@
           <a:bodyPr wrap="square" lIns="0" tIns="0" rIns="0" bIns="0" rtlCol="0" anchor="ctr"/>
           <a:lstStyle/>
           <a:p>
-            <a:pPr algn="r" indent="0" marL="0">
+            <a:pPr marL="0" indent="0" algn="r">
               <a:buNone/>
             </a:pPr>
             <a:r>
@@ -7351,6 +7356,7 @@
         <a:solidFill>
           <a:srgbClr val="FFFFFF"/>
         </a:solidFill>
+        <a:effectLst/>
       </p:bgPr>
     </p:bg>
     <p:spTree>
@@ -7388,7 +7394,7 @@
           <a:bodyPr wrap="square" lIns="0" tIns="0" rIns="0" bIns="0" rtlCol="0" anchor="ctr"/>
           <a:lstStyle/>
           <a:p>
-            <a:pPr algn="l" indent="0" marL="0">
+            <a:pPr marL="0" indent="0" algn="l">
               <a:buNone/>
             </a:pPr>
             <a:r>
@@ -7427,6 +7433,13 @@
           </a:solidFill>
           <a:ln/>
         </p:spPr>
+        <p:txBody>
+          <a:bodyPr/>
+          <a:lstStyle/>
+          <a:p>
+            <a:endParaRPr lang="en-US"/>
+          </a:p>
+        </p:txBody>
       </p:sp>
       <p:sp>
         <p:nvSpPr>
@@ -7449,6 +7462,13 @@
           </a:solidFill>
           <a:ln/>
         </p:spPr>
+        <p:txBody>
+          <a:bodyPr/>
+          <a:lstStyle/>
+          <a:p>
+            <a:endParaRPr lang="en-US"/>
+          </a:p>
+        </p:txBody>
       </p:sp>
       <p:sp>
         <p:nvSpPr>
@@ -7471,7 +7491,7 @@
           <a:bodyPr wrap="square" lIns="0" tIns="0" rIns="0" bIns="0" rtlCol="0" anchor="ctr"/>
           <a:lstStyle/>
           <a:p>
-            <a:pPr algn="ctr" indent="0" marL="0">
+            <a:pPr marL="0" indent="0" algn="ctr">
               <a:buNone/>
             </a:pPr>
             <a:r>
@@ -7510,7 +7530,7 @@
           <a:bodyPr wrap="square" lIns="0" tIns="0" rIns="0" bIns="0" rtlCol="0" anchor="ctr"/>
           <a:lstStyle/>
           <a:p>
-            <a:pPr indent="0" marL="0">
+            <a:pPr marL="0" indent="0">
               <a:lnSpc>
                 <a:spcPct val="115000"/>
               </a:lnSpc>
@@ -7552,7 +7572,7 @@
           <a:bodyPr wrap="square" lIns="0" tIns="0" rIns="0" bIns="0" rtlCol="0" anchor="ctr"/>
           <a:lstStyle/>
           <a:p>
-            <a:pPr indent="0" marL="0">
+            <a:pPr marL="0" indent="0">
               <a:lnSpc>
                 <a:spcPct val="120000"/>
               </a:lnSpc>
@@ -7594,6 +7614,13 @@
           </a:solidFill>
           <a:ln/>
         </p:spPr>
+        <p:txBody>
+          <a:bodyPr/>
+          <a:lstStyle/>
+          <a:p>
+            <a:endParaRPr lang="en-US"/>
+          </a:p>
+        </p:txBody>
       </p:sp>
       <p:sp>
         <p:nvSpPr>
@@ -7616,6 +7643,13 @@
           </a:solidFill>
           <a:ln/>
         </p:spPr>
+        <p:txBody>
+          <a:bodyPr/>
+          <a:lstStyle/>
+          <a:p>
+            <a:endParaRPr lang="en-US"/>
+          </a:p>
+        </p:txBody>
       </p:sp>
       <p:sp>
         <p:nvSpPr>
@@ -7638,7 +7672,7 @@
           <a:bodyPr wrap="square" lIns="0" tIns="0" rIns="0" bIns="0" rtlCol="0" anchor="ctr"/>
           <a:lstStyle/>
           <a:p>
-            <a:pPr algn="ctr" indent="0" marL="0">
+            <a:pPr marL="0" indent="0" algn="ctr">
               <a:buNone/>
             </a:pPr>
             <a:r>
@@ -7677,7 +7711,7 @@
           <a:bodyPr wrap="square" lIns="0" tIns="0" rIns="0" bIns="0" rtlCol="0" anchor="ctr"/>
           <a:lstStyle/>
           <a:p>
-            <a:pPr indent="0" marL="0">
+            <a:pPr marL="0" indent="0">
               <a:lnSpc>
                 <a:spcPct val="115000"/>
               </a:lnSpc>
@@ -7719,7 +7753,7 @@
           <a:bodyPr wrap="square" lIns="0" tIns="0" rIns="0" bIns="0" rtlCol="0" anchor="ctr"/>
           <a:lstStyle/>
           <a:p>
-            <a:pPr indent="0" marL="0">
+            <a:pPr marL="0" indent="0">
               <a:lnSpc>
                 <a:spcPct val="120000"/>
               </a:lnSpc>
@@ -7761,6 +7795,13 @@
           </a:solidFill>
           <a:ln/>
         </p:spPr>
+        <p:txBody>
+          <a:bodyPr/>
+          <a:lstStyle/>
+          <a:p>
+            <a:endParaRPr lang="en-US"/>
+          </a:p>
+        </p:txBody>
       </p:sp>
       <p:sp>
         <p:nvSpPr>
@@ -7783,6 +7824,13 @@
           </a:solidFill>
           <a:ln/>
         </p:spPr>
+        <p:txBody>
+          <a:bodyPr/>
+          <a:lstStyle/>
+          <a:p>
+            <a:endParaRPr lang="en-US"/>
+          </a:p>
+        </p:txBody>
       </p:sp>
       <p:sp>
         <p:nvSpPr>
@@ -7805,7 +7853,7 @@
           <a:bodyPr wrap="square" lIns="0" tIns="0" rIns="0" bIns="0" rtlCol="0" anchor="ctr"/>
           <a:lstStyle/>
           <a:p>
-            <a:pPr algn="ctr" indent="0" marL="0">
+            <a:pPr marL="0" indent="0" algn="ctr">
               <a:buNone/>
             </a:pPr>
             <a:r>
@@ -7844,7 +7892,7 @@
           <a:bodyPr wrap="square" lIns="0" tIns="0" rIns="0" bIns="0" rtlCol="0" anchor="ctr"/>
           <a:lstStyle/>
           <a:p>
-            <a:pPr indent="0" marL="0">
+            <a:pPr marL="0" indent="0">
               <a:lnSpc>
                 <a:spcPct val="115000"/>
               </a:lnSpc>
@@ -7886,7 +7934,7 @@
           <a:bodyPr wrap="square" lIns="0" tIns="0" rIns="0" bIns="0" rtlCol="0" anchor="ctr"/>
           <a:lstStyle/>
           <a:p>
-            <a:pPr indent="0" marL="0">
+            <a:pPr marL="0" indent="0">
               <a:lnSpc>
                 <a:spcPct val="120000"/>
               </a:lnSpc>
@@ -7928,7 +7976,7 @@
           <a:bodyPr wrap="square" lIns="0" tIns="0" rIns="0" bIns="0" rtlCol="0" anchor="ctr"/>
           <a:lstStyle/>
           <a:p>
-            <a:pPr indent="0" marL="0">
+            <a:pPr marL="0" indent="0">
               <a:buNone/>
             </a:pPr>
             <a:r>
@@ -7967,7 +8015,7 @@
           <a:bodyPr wrap="square" lIns="0" tIns="0" rIns="0" bIns="0" rtlCol="0" anchor="ctr"/>
           <a:lstStyle/>
           <a:p>
-            <a:pPr algn="r" indent="0" marL="0">
+            <a:pPr marL="0" indent="0" algn="r">
               <a:buNone/>
             </a:pPr>
             <a:r>
@@ -8001,6 +8049,7 @@
         <a:solidFill>
           <a:srgbClr val="FFFFFF"/>
         </a:solidFill>
+        <a:effectLst/>
       </p:bgPr>
     </p:bg>
     <p:spTree>
@@ -8038,7 +8087,7 @@
           <a:bodyPr wrap="square" lIns="0" tIns="0" rIns="0" bIns="0" rtlCol="0" anchor="ctr"/>
           <a:lstStyle/>
           <a:p>
-            <a:pPr algn="l" indent="0" marL="0">
+            <a:pPr marL="0" indent="0" algn="l">
               <a:buNone/>
             </a:pPr>
             <a:r>
@@ -8077,6 +8126,13 @@
           </a:solidFill>
           <a:ln/>
         </p:spPr>
+        <p:txBody>
+          <a:bodyPr/>
+          <a:lstStyle/>
+          <a:p>
+            <a:endParaRPr lang="en-US"/>
+          </a:p>
+        </p:txBody>
       </p:sp>
       <p:sp>
         <p:nvSpPr>
@@ -8099,7 +8155,7 @@
           <a:bodyPr wrap="square" lIns="0" tIns="0" rIns="0" bIns="0" rtlCol="0" anchor="ctr"/>
           <a:lstStyle/>
           <a:p>
-            <a:pPr indent="0" marL="0">
+            <a:pPr marL="0" indent="0">
               <a:buNone/>
             </a:pPr>
             <a:r>
@@ -8138,7 +8194,7 @@
           <a:bodyPr wrap="square" lIns="0" tIns="0" rIns="0" bIns="0" rtlCol="0" anchor="ctr"/>
           <a:lstStyle/>
           <a:p>
-            <a:pPr indent="0" marL="0">
+            <a:pPr marL="0" indent="0">
               <a:buNone/>
             </a:pPr>
             <a:r>
@@ -8177,7 +8233,7 @@
           <a:bodyPr wrap="square" lIns="0" tIns="0" rIns="0" bIns="0" rtlCol="0" anchor="ctr"/>
           <a:lstStyle/>
           <a:p>
-            <a:pPr indent="0" marL="0">
+            <a:pPr marL="0" indent="0">
               <a:lnSpc>
                 <a:spcPct val="125000"/>
               </a:lnSpc>
@@ -8219,6 +8275,13 @@
           </a:solidFill>
           <a:ln/>
         </p:spPr>
+        <p:txBody>
+          <a:bodyPr/>
+          <a:lstStyle/>
+          <a:p>
+            <a:endParaRPr lang="en-US"/>
+          </a:p>
+        </p:txBody>
       </p:sp>
       <p:sp>
         <p:nvSpPr>
@@ -8241,7 +8304,7 @@
           <a:bodyPr wrap="square" lIns="0" tIns="0" rIns="0" bIns="0" rtlCol="0" anchor="ctr"/>
           <a:lstStyle/>
           <a:p>
-            <a:pPr indent="0" marL="0">
+            <a:pPr marL="0" indent="0">
               <a:buNone/>
             </a:pPr>
             <a:r>
@@ -8280,7 +8343,7 @@
           <a:bodyPr wrap="square" lIns="0" tIns="0" rIns="0" bIns="0" rtlCol="0" anchor="ctr"/>
           <a:lstStyle/>
           <a:p>
-            <a:pPr indent="0" marL="0">
+            <a:pPr marL="0" indent="0">
               <a:buNone/>
             </a:pPr>
             <a:r>
@@ -8319,7 +8382,7 @@
           <a:bodyPr wrap="square" lIns="0" tIns="0" rIns="0" bIns="0" rtlCol="0" anchor="ctr"/>
           <a:lstStyle/>
           <a:p>
-            <a:pPr indent="0" marL="0">
+            <a:pPr marL="0" indent="0">
               <a:lnSpc>
                 <a:spcPct val="125000"/>
               </a:lnSpc>
@@ -8361,7 +8424,7 @@
           <a:bodyPr wrap="square" lIns="0" tIns="0" rIns="0" bIns="0" rtlCol="0" anchor="ctr"/>
           <a:lstStyle/>
           <a:p>
-            <a:pPr indent="0" marL="0">
+            <a:pPr marL="0" indent="0">
               <a:buNone/>
             </a:pPr>
             <a:r>
@@ -8400,7 +8463,7 @@
           <a:bodyPr wrap="square" lIns="0" tIns="0" rIns="0" bIns="0" rtlCol="0" anchor="ctr"/>
           <a:lstStyle/>
           <a:p>
-            <a:pPr algn="r" indent="0" marL="0">
+            <a:pPr marL="0" indent="0" algn="r">
               <a:buNone/>
             </a:pPr>
             <a:r>
@@ -8719,4 +8782,319 @@
     </a:ext>
   </a:extLst>
 </a:theme>
+</file>
+
+<file path=ppt/theme/theme2.xml><?xml version="1.0" encoding="utf-8"?>
+<a:theme xmlns:a="http://schemas.openxmlformats.org/drawingml/2006/main" name="Office Theme">
+  <a:themeElements>
+    <a:clrScheme name="Office">
+      <a:dk1>
+        <a:sysClr val="windowText" lastClr="000000"/>
+      </a:dk1>
+      <a:lt1>
+        <a:sysClr val="window" lastClr="FFFFFF"/>
+      </a:lt1>
+      <a:dk2>
+        <a:srgbClr val="0E2841"/>
+      </a:dk2>
+      <a:lt2>
+        <a:srgbClr val="E8E8E8"/>
+      </a:lt2>
+      <a:accent1>
+        <a:srgbClr val="156082"/>
+      </a:accent1>
+      <a:accent2>
+        <a:srgbClr val="E97132"/>
+      </a:accent2>
+      <a:accent3>
+        <a:srgbClr val="196B24"/>
+      </a:accent3>
+      <a:accent4>
+        <a:srgbClr val="0F9ED5"/>
+      </a:accent4>
+      <a:accent5>
+        <a:srgbClr val="A02B93"/>
+      </a:accent5>
+      <a:accent6>
+        <a:srgbClr val="4EA72E"/>
+      </a:accent6>
+      <a:hlink>
+        <a:srgbClr val="467886"/>
+      </a:hlink>
+      <a:folHlink>
+        <a:srgbClr val="96607D"/>
+      </a:folHlink>
+    </a:clrScheme>
+    <a:fontScheme name="Office">
+      <a:majorFont>
+        <a:latin typeface="Aptos Display" panose="02110004020202020204"/>
+        <a:ea typeface=""/>
+        <a:cs typeface=""/>
+        <a:font script="Jpan" typeface="游ゴシック Light"/>
+        <a:font script="Hang" typeface="맑은 고딕"/>
+        <a:font script="Hans" typeface="等线 Light"/>
+        <a:font script="Hant" typeface="新細明體"/>
+        <a:font script="Arab" typeface="Times New Roman"/>
+        <a:font script="Hebr" typeface="Times New Roman"/>
+        <a:font script="Thai" typeface="Angsana New"/>
+        <a:font script="Ethi" typeface="Nyala"/>
+        <a:font script="Beng" typeface="Vrinda"/>
+        <a:font script="Gujr" typeface="Shruti"/>
+        <a:font script="Khmr" typeface="MoolBoran"/>
+        <a:font script="Knda" typeface="Tunga"/>
+        <a:font script="Guru" typeface="Raavi"/>
+        <a:font script="Cans" typeface="Euphemia"/>
+        <a:font script="Cher" typeface="Plantagenet Cherokee"/>
+        <a:font script="Yiii" typeface="Microsoft Yi Baiti"/>
+        <a:font script="Tibt" typeface="Microsoft Himalaya"/>
+        <a:font script="Thaa" typeface="MV Boli"/>
+        <a:font script="Deva" typeface="Mangal"/>
+        <a:font script="Telu" typeface="Gautami"/>
+        <a:font script="Taml" typeface="Latha"/>
+        <a:font script="Syrc" typeface="Estrangelo Edessa"/>
+        <a:font script="Orya" typeface="Kalinga"/>
+        <a:font script="Mlym" typeface="Kartika"/>
+        <a:font script="Laoo" typeface="DokChampa"/>
+        <a:font script="Sinh" typeface="Iskoola Pota"/>
+        <a:font script="Mong" typeface="Mongolian Baiti"/>
+        <a:font script="Viet" typeface="Times New Roman"/>
+        <a:font script="Uigh" typeface="Microsoft Uighur"/>
+        <a:font script="Geor" typeface="Sylfaen"/>
+        <a:font script="Armn" typeface="Arial"/>
+        <a:font script="Bugi" typeface="Leelawadee UI"/>
+        <a:font script="Bopo" typeface="Microsoft JhengHei"/>
+        <a:font script="Java" typeface="Javanese Text"/>
+        <a:font script="Lisu" typeface="Segoe UI"/>
+        <a:font script="Mymr" typeface="Myanmar Text"/>
+        <a:font script="Nkoo" typeface="Ebrima"/>
+        <a:font script="Olck" typeface="Nirmala UI"/>
+        <a:font script="Osma" typeface="Ebrima"/>
+        <a:font script="Phag" typeface="Phagspa"/>
+        <a:font script="Syrn" typeface="Estrangelo Edessa"/>
+        <a:font script="Syrj" typeface="Estrangelo Edessa"/>
+        <a:font script="Syre" typeface="Estrangelo Edessa"/>
+        <a:font script="Sora" typeface="Nirmala UI"/>
+        <a:font script="Tale" typeface="Microsoft Tai Le"/>
+        <a:font script="Talu" typeface="Microsoft New Tai Lue"/>
+        <a:font script="Tfng" typeface="Ebrima"/>
+      </a:majorFont>
+      <a:minorFont>
+        <a:latin typeface="Aptos" panose="02110004020202020204"/>
+        <a:ea typeface=""/>
+        <a:cs typeface=""/>
+        <a:font script="Jpan" typeface="游ゴシック"/>
+        <a:font script="Hang" typeface="맑은 고딕"/>
+        <a:font script="Hans" typeface="等线"/>
+        <a:font script="Hant" typeface="新細明體"/>
+        <a:font script="Arab" typeface="Arial"/>
+        <a:font script="Hebr" typeface="Arial"/>
+        <a:font script="Thai" typeface="Cordia New"/>
+        <a:font script="Ethi" typeface="Nyala"/>
+        <a:font script="Beng" typeface="Vrinda"/>
+        <a:font script="Gujr" typeface="Shruti"/>
+        <a:font script="Khmr" typeface="DaunPenh"/>
+        <a:font script="Knda" typeface="Tunga"/>
+        <a:font script="Guru" typeface="Raavi"/>
+        <a:font script="Cans" typeface="Euphemia"/>
+        <a:font script="Cher" typeface="Plantagenet Cherokee"/>
+        <a:font script="Yiii" typeface="Microsoft Yi Baiti"/>
+        <a:font script="Tibt" typeface="Microsoft Himalaya"/>
+        <a:font script="Thaa" typeface="MV Boli"/>
+        <a:font script="Deva" typeface="Mangal"/>
+        <a:font script="Telu" typeface="Gautami"/>
+        <a:font script="Taml" typeface="Latha"/>
+        <a:font script="Syrc" typeface="Estrangelo Edessa"/>
+        <a:font script="Orya" typeface="Kalinga"/>
+        <a:font script="Mlym" typeface="Kartika"/>
+        <a:font script="Laoo" typeface="DokChampa"/>
+        <a:font script="Sinh" typeface="Iskoola Pota"/>
+        <a:font script="Mong" typeface="Mongolian Baiti"/>
+        <a:font script="Viet" typeface="Arial"/>
+        <a:font script="Uigh" typeface="Microsoft Uighur"/>
+        <a:font script="Geor" typeface="Sylfaen"/>
+        <a:font script="Armn" typeface="Arial"/>
+        <a:font script="Bugi" typeface="Leelawadee UI"/>
+        <a:font script="Bopo" typeface="Microsoft JhengHei"/>
+        <a:font script="Java" typeface="Javanese Text"/>
+        <a:font script="Lisu" typeface="Segoe UI"/>
+        <a:font script="Mymr" typeface="Myanmar Text"/>
+        <a:font script="Nkoo" typeface="Ebrima"/>
+        <a:font script="Olck" typeface="Nirmala UI"/>
+        <a:font script="Osma" typeface="Ebrima"/>
+        <a:font script="Phag" typeface="Phagspa"/>
+        <a:font script="Syrn" typeface="Estrangelo Edessa"/>
+        <a:font script="Syrj" typeface="Estrangelo Edessa"/>
+        <a:font script="Syre" typeface="Estrangelo Edessa"/>
+        <a:font script="Sora" typeface="Nirmala UI"/>
+        <a:font script="Tale" typeface="Microsoft Tai Le"/>
+        <a:font script="Talu" typeface="Microsoft New Tai Lue"/>
+        <a:font script="Tfng" typeface="Ebrima"/>
+      </a:minorFont>
+    </a:fontScheme>
+    <a:fmtScheme name="Office">
+      <a:fillStyleLst>
+        <a:solidFill>
+          <a:schemeClr val="phClr"/>
+        </a:solidFill>
+        <a:gradFill rotWithShape="1">
+          <a:gsLst>
+            <a:gs pos="0">
+              <a:schemeClr val="phClr">
+                <a:lumMod val="110000"/>
+                <a:satMod val="105000"/>
+                <a:tint val="67000"/>
+              </a:schemeClr>
+            </a:gs>
+            <a:gs pos="50000">
+              <a:schemeClr val="phClr">
+                <a:lumMod val="105000"/>
+                <a:satMod val="103000"/>
+                <a:tint val="73000"/>
+              </a:schemeClr>
+            </a:gs>
+            <a:gs pos="100000">
+              <a:schemeClr val="phClr">
+                <a:lumMod val="105000"/>
+                <a:satMod val="109000"/>
+                <a:tint val="81000"/>
+              </a:schemeClr>
+            </a:gs>
+          </a:gsLst>
+          <a:lin ang="5400000" scaled="0"/>
+        </a:gradFill>
+        <a:gradFill rotWithShape="1">
+          <a:gsLst>
+            <a:gs pos="0">
+              <a:schemeClr val="phClr">
+                <a:satMod val="103000"/>
+                <a:lumMod val="102000"/>
+                <a:tint val="94000"/>
+              </a:schemeClr>
+            </a:gs>
+            <a:gs pos="50000">
+              <a:schemeClr val="phClr">
+                <a:satMod val="110000"/>
+                <a:lumMod val="100000"/>
+                <a:shade val="100000"/>
+              </a:schemeClr>
+            </a:gs>
+            <a:gs pos="100000">
+              <a:schemeClr val="phClr">
+                <a:lumMod val="99000"/>
+                <a:satMod val="120000"/>
+                <a:shade val="78000"/>
+              </a:schemeClr>
+            </a:gs>
+          </a:gsLst>
+          <a:lin ang="5400000" scaled="0"/>
+        </a:gradFill>
+      </a:fillStyleLst>
+      <a:lnStyleLst>
+        <a:ln w="12700" cap="flat" cmpd="sng" algn="ctr">
+          <a:solidFill>
+            <a:schemeClr val="phClr"/>
+          </a:solidFill>
+          <a:prstDash val="solid"/>
+          <a:miter lim="800000"/>
+        </a:ln>
+        <a:ln w="19050" cap="flat" cmpd="sng" algn="ctr">
+          <a:solidFill>
+            <a:schemeClr val="phClr"/>
+          </a:solidFill>
+          <a:prstDash val="solid"/>
+          <a:miter lim="800000"/>
+        </a:ln>
+        <a:ln w="25400" cap="flat" cmpd="sng" algn="ctr">
+          <a:solidFill>
+            <a:schemeClr val="phClr"/>
+          </a:solidFill>
+          <a:prstDash val="solid"/>
+          <a:miter lim="800000"/>
+        </a:ln>
+      </a:lnStyleLst>
+      <a:effectStyleLst>
+        <a:effectStyle>
+          <a:effectLst/>
+        </a:effectStyle>
+        <a:effectStyle>
+          <a:effectLst/>
+        </a:effectStyle>
+        <a:effectStyle>
+          <a:effectLst>
+            <a:outerShdw blurRad="57150" dist="19050" dir="5400000" algn="ctr" rotWithShape="0">
+              <a:srgbClr val="000000">
+                <a:alpha val="63000"/>
+              </a:srgbClr>
+            </a:outerShdw>
+          </a:effectLst>
+        </a:effectStyle>
+      </a:effectStyleLst>
+      <a:bgFillStyleLst>
+        <a:solidFill>
+          <a:schemeClr val="phClr"/>
+        </a:solidFill>
+        <a:solidFill>
+          <a:schemeClr val="phClr">
+            <a:tint val="95000"/>
+            <a:satMod val="170000"/>
+          </a:schemeClr>
+        </a:solidFill>
+        <a:gradFill rotWithShape="1">
+          <a:gsLst>
+            <a:gs pos="0">
+              <a:schemeClr val="phClr">
+                <a:tint val="93000"/>
+                <a:satMod val="150000"/>
+                <a:shade val="98000"/>
+                <a:lumMod val="102000"/>
+              </a:schemeClr>
+            </a:gs>
+            <a:gs pos="50000">
+              <a:schemeClr val="phClr">
+                <a:tint val="98000"/>
+                <a:satMod val="130000"/>
+                <a:shade val="90000"/>
+                <a:lumMod val="103000"/>
+              </a:schemeClr>
+            </a:gs>
+            <a:gs pos="100000">
+              <a:schemeClr val="phClr">
+                <a:shade val="63000"/>
+                <a:satMod val="120000"/>
+              </a:schemeClr>
+            </a:gs>
+          </a:gsLst>
+          <a:lin ang="5400000" scaled="0"/>
+        </a:gradFill>
+      </a:bgFillStyleLst>
+    </a:fmtScheme>
+  </a:themeElements>
+  <a:objectDefaults>
+    <a:lnDef>
+      <a:spPr/>
+      <a:bodyPr/>
+      <a:lstStyle/>
+      <a:style>
+        <a:lnRef idx="2">
+          <a:schemeClr val="accent1"/>
+        </a:lnRef>
+        <a:fillRef idx="0">
+          <a:schemeClr val="accent1"/>
+        </a:fillRef>
+        <a:effectRef idx="1">
+          <a:schemeClr val="accent1"/>
+        </a:effectRef>
+        <a:fontRef idx="minor">
+          <a:schemeClr val="tx1"/>
+        </a:fontRef>
+      </a:style>
+    </a:lnDef>
+  </a:objectDefaults>
+  <a:extraClrSchemeLst/>
+  <a:extLst>
+    <a:ext uri="{05A4C25C-085E-4340-85A3-A5531E510DB2}">
+      <thm15:themeFamily xmlns:thm15="http://schemas.microsoft.com/office/thememl/2012/main" name="Office Theme" id="{2E142A2C-CD16-42D6-873A-C26D2A0506FA}" vid="{1BDDFF52-6CD6-40A5-AB3C-68EB2F1E4D0A}"/>
+    </a:ext>
+  </a:extLst>
+</a:theme>
 </file>